--- a/Virtualization.pptx
+++ b/Virtualization.pptx
@@ -5,7 +5,7 @@
     <p:sldMasterId id="2147483654" r:id="rId1"/>
   </p:sldMasterIdLst>
   <p:notesMasterIdLst>
-    <p:notesMasterId r:id="rId36"/>
+    <p:notesMasterId r:id="rId39"/>
   </p:notesMasterIdLst>
   <p:sldIdLst>
     <p:sldId id="363" r:id="rId2"/>
@@ -42,6 +42,9 @@
     <p:sldId id="279" r:id="rId33"/>
     <p:sldId id="280" r:id="rId34"/>
     <p:sldId id="281" r:id="rId35"/>
+    <p:sldId id="364" r:id="rId36"/>
+    <p:sldId id="365" r:id="rId37"/>
+    <p:sldId id="366" r:id="rId38"/>
   </p:sldIdLst>
   <p:sldSz cx="9144000" cy="6858000" type="screen4x3"/>
   <p:notesSz cx="9144000" cy="6858000"/>
@@ -241,7 +244,7 @@
           <a:p>
             <a:fld id="{BC212710-FC46-48F0-9153-67050298C1A6}" type="datetimeFigureOut">
               <a:rPr lang="en-US" smtClean="0"/>
-              <a:t>9/11/2026</a:t>
+              <a:t>9/14/2026</a:t>
             </a:fld>
             <a:endParaRPr lang="en-US"/>
           </a:p>
@@ -2880,7 +2883,7 @@
           <a:p>
             <a:fld id="{1D8BD707-D9CF-40AE-B4C6-C98DA3205C09}" type="datetimeFigureOut">
               <a:rPr lang="en-US" smtClean="0"/>
-              <a:t>9/11/2026</a:t>
+              <a:t>9/14/2026</a:t>
             </a:fld>
             <a:endParaRPr lang="en-US"/>
           </a:p>
@@ -3050,7 +3053,7 @@
           <a:p>
             <a:fld id="{1D8BD707-D9CF-40AE-B4C6-C98DA3205C09}" type="datetimeFigureOut">
               <a:rPr lang="en-US" smtClean="0"/>
-              <a:t>9/11/2026</a:t>
+              <a:t>9/14/2026</a:t>
             </a:fld>
             <a:endParaRPr lang="en-US"/>
           </a:p>
@@ -3230,7 +3233,7 @@
           <a:p>
             <a:fld id="{1D8BD707-D9CF-40AE-B4C6-C98DA3205C09}" type="datetimeFigureOut">
               <a:rPr lang="en-US" smtClean="0"/>
-              <a:t>9/11/2026</a:t>
+              <a:t>9/14/2026</a:t>
             </a:fld>
             <a:endParaRPr lang="en-US"/>
           </a:p>
@@ -3400,7 +3403,7 @@
           <a:p>
             <a:fld id="{1D8BD707-D9CF-40AE-B4C6-C98DA3205C09}" type="datetimeFigureOut">
               <a:rPr lang="en-US" smtClean="0"/>
-              <a:t>9/11/2026</a:t>
+              <a:t>9/14/2026</a:t>
             </a:fld>
             <a:endParaRPr lang="en-US"/>
           </a:p>
@@ -3646,7 +3649,7 @@
           <a:p>
             <a:fld id="{1D8BD707-D9CF-40AE-B4C6-C98DA3205C09}" type="datetimeFigureOut">
               <a:rPr lang="en-US" smtClean="0"/>
-              <a:t>9/11/2026</a:t>
+              <a:t>9/14/2026</a:t>
             </a:fld>
             <a:endParaRPr lang="en-US"/>
           </a:p>
@@ -3878,7 +3881,7 @@
           <a:p>
             <a:fld id="{1D8BD707-D9CF-40AE-B4C6-C98DA3205C09}" type="datetimeFigureOut">
               <a:rPr lang="en-US" smtClean="0"/>
-              <a:t>9/11/2026</a:t>
+              <a:t>9/14/2026</a:t>
             </a:fld>
             <a:endParaRPr lang="en-US"/>
           </a:p>
@@ -4245,7 +4248,7 @@
           <a:p>
             <a:fld id="{1D8BD707-D9CF-40AE-B4C6-C98DA3205C09}" type="datetimeFigureOut">
               <a:rPr lang="en-US" smtClean="0"/>
-              <a:t>9/11/2026</a:t>
+              <a:t>9/14/2026</a:t>
             </a:fld>
             <a:endParaRPr lang="en-US"/>
           </a:p>
@@ -4363,7 +4366,7 @@
           <a:p>
             <a:fld id="{1D8BD707-D9CF-40AE-B4C6-C98DA3205C09}" type="datetimeFigureOut">
               <a:rPr lang="en-US" smtClean="0"/>
-              <a:t>9/11/2026</a:t>
+              <a:t>9/14/2026</a:t>
             </a:fld>
             <a:endParaRPr lang="en-US"/>
           </a:p>
@@ -4458,7 +4461,7 @@
           <a:p>
             <a:fld id="{1D8BD707-D9CF-40AE-B4C6-C98DA3205C09}" type="datetimeFigureOut">
               <a:rPr lang="en-US" smtClean="0"/>
-              <a:t>9/11/2026</a:t>
+              <a:t>9/14/2026</a:t>
             </a:fld>
             <a:endParaRPr lang="en-US"/>
           </a:p>
@@ -4735,7 +4738,7 @@
           <a:p>
             <a:fld id="{1D8BD707-D9CF-40AE-B4C6-C98DA3205C09}" type="datetimeFigureOut">
               <a:rPr lang="en-US" smtClean="0"/>
-              <a:t>9/11/2026</a:t>
+              <a:t>9/14/2026</a:t>
             </a:fld>
             <a:endParaRPr lang="en-US"/>
           </a:p>
@@ -4988,7 +4991,7 @@
           <a:p>
             <a:fld id="{1D8BD707-D9CF-40AE-B4C6-C98DA3205C09}" type="datetimeFigureOut">
               <a:rPr lang="en-US" smtClean="0"/>
-              <a:t>9/11/2026</a:t>
+              <a:t>9/14/2026</a:t>
             </a:fld>
             <a:endParaRPr lang="en-US"/>
           </a:p>
@@ -5201,7 +5204,7 @@
           <a:p>
             <a:fld id="{1D8BD707-D9CF-40AE-B4C6-C98DA3205C09}" type="datetimeFigureOut">
               <a:rPr lang="en-US" smtClean="0"/>
-              <a:t>9/11/2026</a:t>
+              <a:t>9/14/2026</a:t>
             </a:fld>
             <a:endParaRPr lang="en-US"/>
           </a:p>
@@ -7534,13 +7537,8 @@
           <a:p>
             <a:r>
               <a:rPr lang="en-US" sz="600" dirty="0"/>
-              <a:t>https://</a:t>
-            </a:r>
-            <a:r>
-              <a:rPr lang="en-US" sz="600" dirty="0"/>
-              <a:t>github.com/amelcharolinesgn2/cloudSim</a:t>
-            </a:r>
-            <a:endParaRPr lang="en-US" sz="600" dirty="0"/>
+              <a:t>https://github.com/amelcharolinesgn2/cloudSim</a:t>
+            </a:r>
           </a:p>
         </p:txBody>
       </p:sp>
@@ -7569,19 +7567,12 @@
               <a:rPr lang="en-US" sz="600" dirty="0">
                 <a:hlinkClick r:id="rId10"/>
               </a:rPr>
-              <a:t>https://</a:t>
-            </a:r>
-            <a:r>
-              <a:rPr lang="en-US" sz="600" dirty="0">
-                <a:hlinkClick r:id="rId10"/>
-              </a:rPr>
-              <a:t>github.com/amelcharolinesgn2/CCNA 1</a:t>
+              <a:t>https://github.com/amelcharolinesgn2/CCNA 1</a:t>
             </a:r>
             <a:r>
               <a:rPr lang="en-US" sz="600" dirty="0"/>
               <a:t>    </a:t>
             </a:r>
-            <a:endParaRPr lang="en-US" sz="600" dirty="0"/>
           </a:p>
         </p:txBody>
       </p:sp>
@@ -32598,13 +32589,8 @@
           <a:p>
             <a:r>
               <a:rPr lang="en-US" sz="600" dirty="0"/>
-              <a:t>https://</a:t>
-            </a:r>
-            <a:r>
-              <a:rPr lang="en-US" sz="600" dirty="0"/>
-              <a:t>github.com/amelcharolinesgn2/cloudSim</a:t>
-            </a:r>
-            <a:endParaRPr lang="en-US" sz="600" dirty="0"/>
+              <a:t>https://github.com/amelcharolinesgn2/cloudSim</a:t>
+            </a:r>
           </a:p>
         </p:txBody>
       </p:sp>
@@ -32633,19 +32619,12 @@
               <a:rPr lang="en-US" sz="600" dirty="0">
                 <a:hlinkClick r:id="rId10"/>
               </a:rPr>
-              <a:t>https://</a:t>
-            </a:r>
-            <a:r>
-              <a:rPr lang="en-US" sz="600" dirty="0">
-                <a:hlinkClick r:id="rId10"/>
-              </a:rPr>
-              <a:t>github.com/amelcharolinesgn2/CCNA 1</a:t>
+              <a:t>https://github.com/amelcharolinesgn2/CCNA 1</a:t>
             </a:r>
             <a:r>
               <a:rPr lang="en-US" sz="600" dirty="0"/>
               <a:t>    </a:t>
             </a:r>
-            <a:endParaRPr lang="en-US" sz="600" dirty="0"/>
           </a:p>
         </p:txBody>
       </p:sp>
@@ -41175,6 +41154,3122 @@
         </p:txBody>
       </p:sp>
     </p:spTree>
+  </p:cSld>
+  <p:clrMapOvr>
+    <a:masterClrMapping/>
+  </p:clrMapOvr>
+</p:sld>
+</file>
+
+<file path=ppt/slides/slide35.xml><?xml version="1.0" encoding="utf-8"?>
+<p:sld xmlns:a="http://schemas.openxmlformats.org/drawingml/2006/main" xmlns:r="http://schemas.openxmlformats.org/officeDocument/2006/relationships" xmlns:p="http://schemas.openxmlformats.org/presentationml/2006/main">
+  <p:cSld>
+    <p:spTree>
+      <p:nvGrpSpPr>
+        <p:cNvPr id="1" name=""/>
+        <p:cNvGrpSpPr/>
+        <p:nvPr/>
+      </p:nvGrpSpPr>
+      <p:grpSpPr>
+        <a:xfrm>
+          <a:off x="0" y="0"/>
+          <a:ext cx="0" cy="0"/>
+          <a:chOff x="0" y="0"/>
+          <a:chExt cx="0" cy="0"/>
+        </a:xfrm>
+      </p:grpSpPr>
+      <p:sp>
+        <p:nvSpPr>
+          <p:cNvPr id="95234" name="Title 1"/>
+          <p:cNvSpPr>
+            <a:spLocks noGrp="1"/>
+          </p:cNvSpPr>
+          <p:nvPr>
+            <p:ph type="title"/>
+          </p:nvPr>
+        </p:nvSpPr>
+        <p:spPr/>
+        <p:txBody>
+          <a:bodyPr/>
+          <a:lstStyle/>
+          <a:p>
+            <a:r>
+              <a:rPr lang="en-US" altLang="en-US" smtClean="0"/>
+              <a:t>.</a:t>
+            </a:r>
+          </a:p>
+        </p:txBody>
+      </p:sp>
+      <p:sp>
+        <p:nvSpPr>
+          <p:cNvPr id="4" name="Rectangle 3"/>
+          <p:cNvSpPr/>
+          <p:nvPr/>
+        </p:nvSpPr>
+        <p:spPr>
+          <a:xfrm>
+            <a:off x="0" y="0"/>
+            <a:ext cx="9144000" cy="914400"/>
+          </a:xfrm>
+          <a:prstGeom prst="rect">
+            <a:avLst/>
+          </a:prstGeom>
+          <a:solidFill>
+            <a:srgbClr val="E42452">
+              <a:alpha val="94118"/>
+            </a:srgbClr>
+          </a:solidFill>
+          <a:ln>
+            <a:noFill/>
+          </a:ln>
+        </p:spPr>
+        <p:style>
+          <a:lnRef idx="2">
+            <a:schemeClr val="accent1">
+              <a:shade val="50000"/>
+            </a:schemeClr>
+          </a:lnRef>
+          <a:fillRef idx="1">
+            <a:schemeClr val="accent1"/>
+          </a:fillRef>
+          <a:effectRef idx="0">
+            <a:schemeClr val="accent1"/>
+          </a:effectRef>
+          <a:fontRef idx="minor">
+            <a:schemeClr val="lt1"/>
+          </a:fontRef>
+        </p:style>
+        <p:txBody>
+          <a:bodyPr anchor="ctr"/>
+          <a:lstStyle/>
+          <a:p>
+            <a:pPr algn="ctr" eaLnBrk="1" hangingPunct="1">
+              <a:buFont typeface="Times New Roman" pitchFamily="16" charset="0"/>
+              <a:buNone/>
+              <a:defRPr/>
+            </a:pPr>
+            <a:r>
+              <a:rPr lang="en-US" sz="3600" dirty="0" smtClean="0"/>
+              <a:t>Discussion : Compare Infrastructure</a:t>
+            </a:r>
+            <a:endParaRPr lang="en-US" sz="3600" b="1" dirty="0">
+              <a:solidFill>
+                <a:schemeClr val="bg1"/>
+              </a:solidFill>
+            </a:endParaRPr>
+          </a:p>
+        </p:txBody>
+      </p:sp>
+      <p:sp>
+        <p:nvSpPr>
+          <p:cNvPr id="95237" name="AutoShape 2" descr="http://image.slidesharecdn.com/virtualizationfinal-140301120900-phpapp02/95/introduction-to-virtualization-42-638.jpg?cb=1393697478"/>
+          <p:cNvSpPr>
+            <a:spLocks noChangeAspect="1" noChangeArrowheads="1"/>
+          </p:cNvSpPr>
+          <p:nvPr/>
+        </p:nvSpPr>
+        <p:spPr bwMode="auto">
+          <a:xfrm>
+            <a:off x="4498975" y="-144463"/>
+            <a:ext cx="304800" cy="304801"/>
+          </a:xfrm>
+          <a:prstGeom prst="rect">
+            <a:avLst/>
+          </a:prstGeom>
+          <a:noFill/>
+          <a:ln>
+            <a:noFill/>
+          </a:ln>
+          <a:extLst>
+            <a:ext uri="{909E8E84-426E-40DD-AFC4-6F175D3DCCD1}">
+              <a14:hiddenFill xmlns:a14="http://schemas.microsoft.com/office/drawing/2010/main">
+                <a:solidFill>
+                  <a:srgbClr val="FFFFFF"/>
+                </a:solidFill>
+              </a14:hiddenFill>
+            </a:ext>
+            <a:ext uri="{91240B29-F687-4F45-9708-019B960494DF}">
+              <a14:hiddenLine xmlns:a14="http://schemas.microsoft.com/office/drawing/2010/main" w="9525">
+                <a:solidFill>
+                  <a:srgbClr val="000000"/>
+                </a:solidFill>
+                <a:miter lim="800000"/>
+                <a:headEnd/>
+                <a:tailEnd/>
+              </a14:hiddenLine>
+            </a:ext>
+          </a:extLst>
+        </p:spPr>
+        <p:txBody>
+          <a:bodyPr/>
+          <a:lstStyle>
+            <a:lvl1pPr>
+              <a:lnSpc>
+                <a:spcPct val="90000"/>
+              </a:lnSpc>
+              <a:spcBef>
+                <a:spcPts val="750"/>
+              </a:spcBef>
+              <a:buFont typeface="Arial" panose="020B0604020202020204" pitchFamily="34" charset="0"/>
+              <a:buChar char="•"/>
+              <a:defRPr sz="2100">
+                <a:solidFill>
+                  <a:schemeClr val="tx1"/>
+                </a:solidFill>
+                <a:latin typeface="Calibri" panose="020F0502020204030204" pitchFamily="34" charset="0"/>
+              </a:defRPr>
+            </a:lvl1pPr>
+            <a:lvl2pPr marL="742950" indent="-285750">
+              <a:lnSpc>
+                <a:spcPct val="90000"/>
+              </a:lnSpc>
+              <a:spcBef>
+                <a:spcPts val="375"/>
+              </a:spcBef>
+              <a:buFont typeface="Arial" panose="020B0604020202020204" pitchFamily="34" charset="0"/>
+              <a:buChar char="•"/>
+              <a:defRPr>
+                <a:solidFill>
+                  <a:schemeClr val="tx1"/>
+                </a:solidFill>
+                <a:latin typeface="Calibri" panose="020F0502020204030204" pitchFamily="34" charset="0"/>
+              </a:defRPr>
+            </a:lvl2pPr>
+            <a:lvl3pPr marL="1143000" indent="-228600">
+              <a:lnSpc>
+                <a:spcPct val="90000"/>
+              </a:lnSpc>
+              <a:spcBef>
+                <a:spcPts val="375"/>
+              </a:spcBef>
+              <a:buFont typeface="Arial" panose="020B0604020202020204" pitchFamily="34" charset="0"/>
+              <a:buChar char="•"/>
+              <a:defRPr sz="1500">
+                <a:solidFill>
+                  <a:schemeClr val="tx1"/>
+                </a:solidFill>
+                <a:latin typeface="Calibri" panose="020F0502020204030204" pitchFamily="34" charset="0"/>
+              </a:defRPr>
+            </a:lvl3pPr>
+            <a:lvl4pPr marL="1600200" indent="-228600">
+              <a:lnSpc>
+                <a:spcPct val="90000"/>
+              </a:lnSpc>
+              <a:spcBef>
+                <a:spcPts val="375"/>
+              </a:spcBef>
+              <a:buFont typeface="Arial" panose="020B0604020202020204" pitchFamily="34" charset="0"/>
+              <a:buChar char="•"/>
+              <a:defRPr sz="1300">
+                <a:solidFill>
+                  <a:schemeClr val="tx1"/>
+                </a:solidFill>
+                <a:latin typeface="Calibri" panose="020F0502020204030204" pitchFamily="34" charset="0"/>
+              </a:defRPr>
+            </a:lvl4pPr>
+            <a:lvl5pPr marL="2057400" indent="-228600">
+              <a:lnSpc>
+                <a:spcPct val="90000"/>
+              </a:lnSpc>
+              <a:spcBef>
+                <a:spcPts val="375"/>
+              </a:spcBef>
+              <a:buFont typeface="Arial" panose="020B0604020202020204" pitchFamily="34" charset="0"/>
+              <a:buChar char="•"/>
+              <a:defRPr sz="1300">
+                <a:solidFill>
+                  <a:schemeClr val="tx1"/>
+                </a:solidFill>
+                <a:latin typeface="Calibri" panose="020F0502020204030204" pitchFamily="34" charset="0"/>
+              </a:defRPr>
+            </a:lvl5pPr>
+            <a:lvl6pPr marL="2514600" indent="-228600" fontAlgn="base">
+              <a:lnSpc>
+                <a:spcPct val="90000"/>
+              </a:lnSpc>
+              <a:spcBef>
+                <a:spcPts val="375"/>
+              </a:spcBef>
+              <a:spcAft>
+                <a:spcPct val="0"/>
+              </a:spcAft>
+              <a:buFont typeface="Arial" panose="020B0604020202020204" pitchFamily="34" charset="0"/>
+              <a:buChar char="•"/>
+              <a:defRPr sz="1300">
+                <a:solidFill>
+                  <a:schemeClr val="tx1"/>
+                </a:solidFill>
+                <a:latin typeface="Calibri" panose="020F0502020204030204" pitchFamily="34" charset="0"/>
+              </a:defRPr>
+            </a:lvl6pPr>
+            <a:lvl7pPr marL="2971800" indent="-228600" fontAlgn="base">
+              <a:lnSpc>
+                <a:spcPct val="90000"/>
+              </a:lnSpc>
+              <a:spcBef>
+                <a:spcPts val="375"/>
+              </a:spcBef>
+              <a:spcAft>
+                <a:spcPct val="0"/>
+              </a:spcAft>
+              <a:buFont typeface="Arial" panose="020B0604020202020204" pitchFamily="34" charset="0"/>
+              <a:buChar char="•"/>
+              <a:defRPr sz="1300">
+                <a:solidFill>
+                  <a:schemeClr val="tx1"/>
+                </a:solidFill>
+                <a:latin typeface="Calibri" panose="020F0502020204030204" pitchFamily="34" charset="0"/>
+              </a:defRPr>
+            </a:lvl7pPr>
+            <a:lvl8pPr marL="3429000" indent="-228600" fontAlgn="base">
+              <a:lnSpc>
+                <a:spcPct val="90000"/>
+              </a:lnSpc>
+              <a:spcBef>
+                <a:spcPts val="375"/>
+              </a:spcBef>
+              <a:spcAft>
+                <a:spcPct val="0"/>
+              </a:spcAft>
+              <a:buFont typeface="Arial" panose="020B0604020202020204" pitchFamily="34" charset="0"/>
+              <a:buChar char="•"/>
+              <a:defRPr sz="1300">
+                <a:solidFill>
+                  <a:schemeClr val="tx1"/>
+                </a:solidFill>
+                <a:latin typeface="Calibri" panose="020F0502020204030204" pitchFamily="34" charset="0"/>
+              </a:defRPr>
+            </a:lvl8pPr>
+            <a:lvl9pPr marL="3886200" indent="-228600" fontAlgn="base">
+              <a:lnSpc>
+                <a:spcPct val="90000"/>
+              </a:lnSpc>
+              <a:spcBef>
+                <a:spcPts val="375"/>
+              </a:spcBef>
+              <a:spcAft>
+                <a:spcPct val="0"/>
+              </a:spcAft>
+              <a:buFont typeface="Arial" panose="020B0604020202020204" pitchFamily="34" charset="0"/>
+              <a:buChar char="•"/>
+              <a:defRPr sz="1300">
+                <a:solidFill>
+                  <a:schemeClr val="tx1"/>
+                </a:solidFill>
+                <a:latin typeface="Calibri" panose="020F0502020204030204" pitchFamily="34" charset="0"/>
+              </a:defRPr>
+            </a:lvl9pPr>
+          </a:lstStyle>
+          <a:p>
+            <a:pPr algn="ctr" eaLnBrk="1" hangingPunct="1">
+              <a:lnSpc>
+                <a:spcPct val="100000"/>
+              </a:lnSpc>
+              <a:spcBef>
+                <a:spcPct val="0"/>
+              </a:spcBef>
+              <a:buFontTx/>
+              <a:buNone/>
+            </a:pPr>
+            <a:endParaRPr lang="en-US" altLang="en-US" sz="1800">
+              <a:latin typeface="Courier New" panose="02070309020205020404" pitchFamily="49" charset="0"/>
+            </a:endParaRPr>
+          </a:p>
+        </p:txBody>
+      </p:sp>
+      <p:graphicFrame>
+        <p:nvGraphicFramePr>
+          <p:cNvPr id="7" name="Table 6"/>
+          <p:cNvGraphicFramePr>
+            <a:graphicFrameLocks noGrp="1"/>
+          </p:cNvGraphicFramePr>
+          <p:nvPr/>
+        </p:nvGraphicFramePr>
+        <p:xfrm>
+          <a:off x="381000" y="1397000"/>
+          <a:ext cx="8382000" cy="3594100"/>
+        </p:xfrm>
+        <a:graphic>
+          <a:graphicData uri="http://schemas.openxmlformats.org/drawingml/2006/table">
+            <a:tbl>
+              <a:tblPr firstRow="1" bandRow="1">
+                <a:tableStyleId>{5C22544A-7EE6-4342-B048-85BDC9FD1C3A}</a:tableStyleId>
+              </a:tblPr>
+              <a:tblGrid>
+                <a:gridCol w="1447800">
+                  <a:extLst>
+                    <a:ext uri="{9D8B030D-6E8A-4147-A177-3AD203B41FA5}">
+                      <a16:colId xmlns:a16="http://schemas.microsoft.com/office/drawing/2014/main" val="1736761003"/>
+                    </a:ext>
+                  </a:extLst>
+                </a:gridCol>
+                <a:gridCol w="3429000">
+                  <a:extLst>
+                    <a:ext uri="{9D8B030D-6E8A-4147-A177-3AD203B41FA5}">
+                      <a16:colId xmlns:a16="http://schemas.microsoft.com/office/drawing/2014/main" val="389452644"/>
+                    </a:ext>
+                  </a:extLst>
+                </a:gridCol>
+                <a:gridCol w="3505200">
+                  <a:extLst>
+                    <a:ext uri="{9D8B030D-6E8A-4147-A177-3AD203B41FA5}">
+                      <a16:colId xmlns:a16="http://schemas.microsoft.com/office/drawing/2014/main" val="3602782763"/>
+                    </a:ext>
+                  </a:extLst>
+                </a:gridCol>
+              </a:tblGrid>
+              <a:tr h="370840">
+                <a:tc>
+                  <a:txBody>
+                    <a:bodyPr/>
+                    <a:lstStyle/>
+                    <a:p>
+                      <a:r>
+                        <a:rPr lang="en-US" dirty="0" err="1" smtClean="0"/>
+                        <a:t>Fitur</a:t>
+                      </a:r>
+                      <a:endParaRPr lang="en-US" dirty="0"/>
+                    </a:p>
+                  </a:txBody>
+                  <a:tcPr/>
+                </a:tc>
+                <a:tc>
+                  <a:txBody>
+                    <a:bodyPr/>
+                    <a:lstStyle/>
+                    <a:p>
+                      <a:r>
+                        <a:rPr lang="en-US" dirty="0" smtClean="0"/>
+                        <a:t>Virtualization</a:t>
+                      </a:r>
+                      <a:endParaRPr lang="en-US" dirty="0"/>
+                    </a:p>
+                  </a:txBody>
+                  <a:tcPr/>
+                </a:tc>
+                <a:tc>
+                  <a:txBody>
+                    <a:bodyPr/>
+                    <a:lstStyle/>
+                    <a:p>
+                      <a:r>
+                        <a:rPr lang="en-US" dirty="0" err="1" smtClean="0"/>
+                        <a:t>Infrastruktur</a:t>
+                      </a:r>
+                      <a:r>
+                        <a:rPr lang="en-US" dirty="0" smtClean="0"/>
+                        <a:t> </a:t>
+                      </a:r>
+                      <a:r>
+                        <a:rPr lang="en-US" sz="1350" b="1" i="1" u="none" strike="noStrike" kern="1200" dirty="0" smtClean="0">
+                          <a:solidFill>
+                            <a:schemeClr val="lt1"/>
+                          </a:solidFill>
+                          <a:effectLst/>
+                          <a:latin typeface="+mn-lt"/>
+                          <a:ea typeface="+mn-ea"/>
+                          <a:cs typeface="+mn-cs"/>
+                        </a:rPr>
+                        <a:t>Cloud</a:t>
+                      </a:r>
+                      <a:r>
+                        <a:rPr lang="en-US" dirty="0" smtClean="0"/>
+                        <a:t> (</a:t>
+                      </a:r>
+                      <a:r>
+                        <a:rPr lang="en-US" sz="1350" b="1" i="1" u="none" strike="noStrike" kern="1200" dirty="0" smtClean="0">
+                          <a:solidFill>
+                            <a:schemeClr val="lt1"/>
+                          </a:solidFill>
+                          <a:effectLst/>
+                          <a:latin typeface="+mn-lt"/>
+                          <a:ea typeface="+mn-ea"/>
+                          <a:cs typeface="+mn-cs"/>
+                        </a:rPr>
+                        <a:t>Cloud Computing</a:t>
+                      </a:r>
+                      <a:r>
+                        <a:rPr lang="en-US" dirty="0" smtClean="0"/>
+                        <a:t>)</a:t>
+                      </a:r>
+                      <a:endParaRPr lang="en-US" dirty="0"/>
+                    </a:p>
+                  </a:txBody>
+                  <a:tcPr/>
+                </a:tc>
+                <a:extLst>
+                  <a:ext uri="{0D108BD9-81ED-4DB2-BD59-A6C34878D82A}">
+                    <a16:rowId xmlns:a16="http://schemas.microsoft.com/office/drawing/2014/main" val="469424660"/>
+                  </a:ext>
+                </a:extLst>
+              </a:tr>
+              <a:tr h="370840">
+                <a:tc>
+                  <a:txBody>
+                    <a:bodyPr/>
+                    <a:lstStyle/>
+                    <a:p>
+                      <a:r>
+                        <a:rPr lang="en-US" dirty="0" err="1" smtClean="0"/>
+                        <a:t>Definisi</a:t>
+                      </a:r>
+                      <a:endParaRPr lang="en-US" dirty="0"/>
+                    </a:p>
+                  </a:txBody>
+                  <a:tcPr/>
+                </a:tc>
+                <a:tc>
+                  <a:txBody>
+                    <a:bodyPr/>
+                    <a:lstStyle/>
+                    <a:p>
+                      <a:r>
+                        <a:rPr lang="en-US" dirty="0" err="1" smtClean="0"/>
+                        <a:t>Teknologi</a:t>
+                      </a:r>
+                      <a:r>
+                        <a:rPr lang="en-US" dirty="0" smtClean="0"/>
+                        <a:t> </a:t>
+                      </a:r>
+                      <a:r>
+                        <a:rPr lang="en-US" dirty="0" err="1" smtClean="0"/>
+                        <a:t>untuk</a:t>
+                      </a:r>
+                      <a:r>
+                        <a:rPr lang="en-US" dirty="0" smtClean="0"/>
+                        <a:t> </a:t>
+                      </a:r>
+                      <a:r>
+                        <a:rPr lang="en-US" dirty="0" err="1" smtClean="0"/>
+                        <a:t>membagi</a:t>
+                      </a:r>
+                      <a:r>
+                        <a:rPr lang="en-US" dirty="0" smtClean="0"/>
+                        <a:t> </a:t>
+                      </a:r>
+                      <a:r>
+                        <a:rPr lang="en-US" dirty="0" err="1" smtClean="0"/>
+                        <a:t>satu</a:t>
+                      </a:r>
+                      <a:r>
+                        <a:rPr lang="en-US" dirty="0" smtClean="0"/>
+                        <a:t> </a:t>
+                      </a:r>
+                      <a:r>
+                        <a:rPr lang="en-US" sz="1350" b="0" i="1" u="none" strike="noStrike" kern="1200" dirty="0" smtClean="0">
+                          <a:solidFill>
+                            <a:schemeClr val="dk1"/>
+                          </a:solidFill>
+                          <a:effectLst/>
+                          <a:latin typeface="+mn-lt"/>
+                          <a:ea typeface="+mn-ea"/>
+                          <a:cs typeface="+mn-cs"/>
+                        </a:rPr>
+                        <a:t>hardware</a:t>
+                      </a:r>
+                      <a:r>
+                        <a:rPr lang="en-US" dirty="0" smtClean="0"/>
+                        <a:t> </a:t>
+                      </a:r>
+                      <a:r>
+                        <a:rPr lang="en-US" dirty="0" err="1" smtClean="0"/>
+                        <a:t>fisik</a:t>
+                      </a:r>
+                      <a:r>
+                        <a:rPr lang="en-US" dirty="0" smtClean="0"/>
+                        <a:t> </a:t>
+                      </a:r>
+                      <a:r>
+                        <a:rPr lang="en-US" dirty="0" err="1" smtClean="0"/>
+                        <a:t>menjadi</a:t>
+                      </a:r>
+                      <a:r>
+                        <a:rPr lang="en-US" dirty="0" smtClean="0"/>
+                        <a:t> </a:t>
+                      </a:r>
+                      <a:r>
+                        <a:rPr lang="en-US" dirty="0" err="1" smtClean="0"/>
+                        <a:t>beberapa</a:t>
+                      </a:r>
+                      <a:r>
+                        <a:rPr lang="en-US" dirty="0" smtClean="0"/>
+                        <a:t> </a:t>
+                      </a:r>
+                      <a:r>
+                        <a:rPr lang="en-US" dirty="0" err="1" smtClean="0"/>
+                        <a:t>mesin</a:t>
+                      </a:r>
+                      <a:r>
+                        <a:rPr lang="en-US" dirty="0" smtClean="0"/>
+                        <a:t> virtual (VM).</a:t>
+                      </a:r>
+                      <a:endParaRPr lang="en-US" dirty="0"/>
+                    </a:p>
+                  </a:txBody>
+                  <a:tcPr/>
+                </a:tc>
+                <a:tc>
+                  <a:txBody>
+                    <a:bodyPr/>
+                    <a:lstStyle/>
+                    <a:p>
+                      <a:r>
+                        <a:rPr lang="en-US" dirty="0" err="1" smtClean="0"/>
+                        <a:t>Ekosistem</a:t>
+                      </a:r>
+                      <a:r>
+                        <a:rPr lang="en-US" dirty="0" smtClean="0"/>
+                        <a:t> TI yang </a:t>
+                      </a:r>
+                      <a:r>
+                        <a:rPr lang="en-US" dirty="0" err="1" smtClean="0"/>
+                        <a:t>menyediakan</a:t>
+                      </a:r>
+                      <a:r>
+                        <a:rPr lang="en-US" dirty="0" smtClean="0"/>
+                        <a:t> </a:t>
+                      </a:r>
+                      <a:r>
+                        <a:rPr lang="en-US" dirty="0" err="1" smtClean="0"/>
+                        <a:t>sumber</a:t>
+                      </a:r>
+                      <a:r>
+                        <a:rPr lang="en-US" dirty="0" smtClean="0"/>
+                        <a:t> </a:t>
+                      </a:r>
+                      <a:r>
+                        <a:rPr lang="en-US" dirty="0" err="1" smtClean="0"/>
+                        <a:t>daya</a:t>
+                      </a:r>
+                      <a:r>
+                        <a:rPr lang="en-US" dirty="0" smtClean="0"/>
+                        <a:t> (data, </a:t>
+                      </a:r>
+                      <a:r>
+                        <a:rPr lang="en-US" dirty="0" err="1" smtClean="0"/>
+                        <a:t>jaringan</a:t>
+                      </a:r>
+                      <a:r>
+                        <a:rPr lang="en-US" dirty="0" smtClean="0"/>
+                        <a:t>, server) </a:t>
+                      </a:r>
+                      <a:r>
+                        <a:rPr lang="en-US" dirty="0" err="1" smtClean="0"/>
+                        <a:t>sesuai</a:t>
+                      </a:r>
+                      <a:r>
+                        <a:rPr lang="en-US" dirty="0" smtClean="0"/>
+                        <a:t> </a:t>
+                      </a:r>
+                      <a:r>
+                        <a:rPr lang="en-US" dirty="0" err="1" smtClean="0"/>
+                        <a:t>permintaan</a:t>
+                      </a:r>
+                      <a:r>
+                        <a:rPr lang="en-US" dirty="0" smtClean="0"/>
+                        <a:t> </a:t>
+                      </a:r>
+                      <a:r>
+                        <a:rPr lang="en-US" dirty="0" err="1" smtClean="0"/>
+                        <a:t>melalui</a:t>
+                      </a:r>
+                      <a:r>
+                        <a:rPr lang="en-US" dirty="0" smtClean="0"/>
+                        <a:t> internet.</a:t>
+                      </a:r>
+                      <a:endParaRPr lang="en-US" dirty="0"/>
+                    </a:p>
+                  </a:txBody>
+                  <a:tcPr/>
+                </a:tc>
+                <a:extLst>
+                  <a:ext uri="{0D108BD9-81ED-4DB2-BD59-A6C34878D82A}">
+                    <a16:rowId xmlns:a16="http://schemas.microsoft.com/office/drawing/2014/main" val="950255294"/>
+                  </a:ext>
+                </a:extLst>
+              </a:tr>
+              <a:tr h="370840">
+                <a:tc>
+                  <a:txBody>
+                    <a:bodyPr/>
+                    <a:lstStyle/>
+                    <a:p>
+                      <a:r>
+                        <a:rPr lang="en-US" dirty="0" err="1" smtClean="0"/>
+                        <a:t>Ketergantungan</a:t>
+                      </a:r>
+                      <a:endParaRPr lang="en-US" dirty="0"/>
+                    </a:p>
+                  </a:txBody>
+                  <a:tcPr/>
+                </a:tc>
+                <a:tc>
+                  <a:txBody>
+                    <a:bodyPr/>
+                    <a:lstStyle/>
+                    <a:p>
+                      <a:r>
+                        <a:rPr lang="it-IT" dirty="0" smtClean="0"/>
+                        <a:t>Bisa berdiri sendiri tanpa teknologi </a:t>
+                      </a:r>
+                      <a:r>
+                        <a:rPr lang="it-IT" sz="1350" b="0" i="1" u="none" strike="noStrike" kern="1200" dirty="0" smtClean="0">
+                          <a:solidFill>
+                            <a:schemeClr val="dk1"/>
+                          </a:solidFill>
+                          <a:effectLst/>
+                          <a:latin typeface="+mn-lt"/>
+                          <a:ea typeface="+mn-ea"/>
+                          <a:cs typeface="+mn-cs"/>
+                        </a:rPr>
+                        <a:t>cloud</a:t>
+                      </a:r>
+                      <a:r>
+                        <a:rPr lang="it-IT" dirty="0" smtClean="0"/>
+                        <a:t>.</a:t>
+                      </a:r>
+                      <a:endParaRPr lang="en-US" dirty="0"/>
+                    </a:p>
+                  </a:txBody>
+                  <a:tcPr/>
+                </a:tc>
+                <a:tc>
+                  <a:txBody>
+                    <a:bodyPr/>
+                    <a:lstStyle/>
+                    <a:p>
+                      <a:r>
+                        <a:rPr lang="en-US" dirty="0" err="1" smtClean="0"/>
+                        <a:t>Membutuhkan</a:t>
+                      </a:r>
+                      <a:r>
+                        <a:rPr lang="en-US" dirty="0" smtClean="0"/>
+                        <a:t> </a:t>
+                      </a:r>
+                      <a:r>
+                        <a:rPr lang="en-US" dirty="0" err="1" smtClean="0"/>
+                        <a:t>virtualisasi</a:t>
+                      </a:r>
+                      <a:r>
+                        <a:rPr lang="en-US" dirty="0" smtClean="0"/>
+                        <a:t> </a:t>
+                      </a:r>
+                      <a:r>
+                        <a:rPr lang="en-US" dirty="0" err="1" smtClean="0"/>
+                        <a:t>sebagai</a:t>
+                      </a:r>
+                      <a:r>
+                        <a:rPr lang="en-US" dirty="0" smtClean="0"/>
+                        <a:t> </a:t>
+                      </a:r>
+                      <a:r>
+                        <a:rPr lang="en-US" dirty="0" err="1" smtClean="0"/>
+                        <a:t>fondasi</a:t>
+                      </a:r>
+                      <a:r>
+                        <a:rPr lang="en-US" dirty="0" smtClean="0"/>
+                        <a:t> </a:t>
+                      </a:r>
+                      <a:r>
+                        <a:rPr lang="en-US" dirty="0" err="1" smtClean="0"/>
+                        <a:t>dasarnya</a:t>
+                      </a:r>
+                      <a:r>
+                        <a:rPr lang="en-US" dirty="0" smtClean="0"/>
+                        <a:t>.</a:t>
+                      </a:r>
+                      <a:endParaRPr lang="en-US" dirty="0"/>
+                    </a:p>
+                  </a:txBody>
+                  <a:tcPr/>
+                </a:tc>
+                <a:extLst>
+                  <a:ext uri="{0D108BD9-81ED-4DB2-BD59-A6C34878D82A}">
+                    <a16:rowId xmlns:a16="http://schemas.microsoft.com/office/drawing/2014/main" val="3351059573"/>
+                  </a:ext>
+                </a:extLst>
+              </a:tr>
+              <a:tr h="370840">
+                <a:tc>
+                  <a:txBody>
+                    <a:bodyPr/>
+                    <a:lstStyle/>
+                    <a:p>
+                      <a:r>
+                        <a:rPr lang="en-US" dirty="0" err="1" smtClean="0"/>
+                        <a:t>Otomatisasi</a:t>
+                      </a:r>
+                      <a:endParaRPr lang="en-US" dirty="0"/>
+                    </a:p>
+                  </a:txBody>
+                  <a:tcPr/>
+                </a:tc>
+                <a:tc>
+                  <a:txBody>
+                    <a:bodyPr/>
+                    <a:lstStyle/>
+                    <a:p>
+                      <a:r>
+                        <a:rPr lang="en-US" dirty="0" err="1" smtClean="0"/>
+                        <a:t>Terbatas</a:t>
+                      </a:r>
+                      <a:r>
+                        <a:rPr lang="en-US" dirty="0" smtClean="0"/>
+                        <a:t>. </a:t>
+                      </a:r>
+                      <a:r>
+                        <a:rPr lang="en-US" dirty="0" err="1" smtClean="0"/>
+                        <a:t>Masih</a:t>
+                      </a:r>
+                      <a:r>
+                        <a:rPr lang="en-US" dirty="0" smtClean="0"/>
+                        <a:t> </a:t>
+                      </a:r>
+                      <a:r>
+                        <a:rPr lang="en-US" dirty="0" err="1" smtClean="0"/>
+                        <a:t>memerlukan</a:t>
+                      </a:r>
+                      <a:r>
+                        <a:rPr lang="en-US" dirty="0" smtClean="0"/>
+                        <a:t> </a:t>
+                      </a:r>
+                      <a:r>
+                        <a:rPr lang="en-US" dirty="0" err="1" smtClean="0"/>
+                        <a:t>intervensi</a:t>
+                      </a:r>
+                      <a:r>
+                        <a:rPr lang="en-US" dirty="0" smtClean="0"/>
+                        <a:t> admin TI </a:t>
+                      </a:r>
+                      <a:r>
+                        <a:rPr lang="en-US" dirty="0" err="1" smtClean="0"/>
+                        <a:t>untuk</a:t>
+                      </a:r>
+                      <a:r>
+                        <a:rPr lang="en-US" dirty="0" smtClean="0"/>
+                        <a:t> </a:t>
+                      </a:r>
+                      <a:r>
+                        <a:rPr lang="en-US" dirty="0" err="1" smtClean="0"/>
+                        <a:t>membuat</a:t>
+                      </a:r>
+                      <a:r>
+                        <a:rPr lang="en-US" dirty="0" smtClean="0"/>
+                        <a:t> </a:t>
+                      </a:r>
+                      <a:r>
+                        <a:rPr lang="en-US" dirty="0" err="1" smtClean="0"/>
+                        <a:t>atau</a:t>
+                      </a:r>
+                      <a:r>
+                        <a:rPr lang="en-US" dirty="0" smtClean="0"/>
+                        <a:t> </a:t>
+                      </a:r>
+                      <a:r>
+                        <a:rPr lang="en-US" dirty="0" err="1" smtClean="0"/>
+                        <a:t>mengatur</a:t>
+                      </a:r>
+                      <a:r>
+                        <a:rPr lang="en-US" dirty="0" smtClean="0"/>
+                        <a:t> VM.</a:t>
+                      </a:r>
+                      <a:endParaRPr lang="en-US" dirty="0"/>
+                    </a:p>
+                  </a:txBody>
+                  <a:tcPr/>
+                </a:tc>
+                <a:tc>
+                  <a:txBody>
+                    <a:bodyPr/>
+                    <a:lstStyle/>
+                    <a:p>
+                      <a:r>
+                        <a:rPr lang="en-US" dirty="0" err="1" smtClean="0"/>
+                        <a:t>Pengguna</a:t>
+                      </a:r>
+                      <a:r>
+                        <a:rPr lang="en-US" dirty="0" smtClean="0"/>
+                        <a:t> </a:t>
+                      </a:r>
+                      <a:r>
+                        <a:rPr lang="en-US" dirty="0" err="1" smtClean="0"/>
+                        <a:t>bisa</a:t>
+                      </a:r>
+                      <a:r>
+                        <a:rPr lang="en-US" dirty="0" smtClean="0"/>
+                        <a:t> </a:t>
+                      </a:r>
+                      <a:r>
+                        <a:rPr lang="en-US" dirty="0" err="1" smtClean="0"/>
+                        <a:t>menambah</a:t>
+                      </a:r>
+                      <a:r>
+                        <a:rPr lang="en-US" dirty="0" smtClean="0"/>
+                        <a:t>/</a:t>
+                      </a:r>
+                      <a:r>
+                        <a:rPr lang="en-US" dirty="0" err="1" smtClean="0"/>
+                        <a:t>mengurangi</a:t>
+                      </a:r>
+                      <a:r>
+                        <a:rPr lang="en-US" dirty="0" smtClean="0"/>
+                        <a:t> </a:t>
+                      </a:r>
+                      <a:r>
+                        <a:rPr lang="en-US" dirty="0" err="1" smtClean="0"/>
+                        <a:t>sumber</a:t>
+                      </a:r>
+                      <a:r>
+                        <a:rPr lang="en-US" dirty="0" smtClean="0"/>
+                        <a:t> </a:t>
+                      </a:r>
+                      <a:r>
+                        <a:rPr lang="en-US" dirty="0" err="1" smtClean="0"/>
+                        <a:t>daya</a:t>
+                      </a:r>
+                      <a:r>
+                        <a:rPr lang="en-US" dirty="0" smtClean="0"/>
+                        <a:t> </a:t>
+                      </a:r>
+                      <a:r>
+                        <a:rPr lang="en-US" dirty="0" err="1" smtClean="0"/>
+                        <a:t>sendiri</a:t>
+                      </a:r>
+                      <a:r>
+                        <a:rPr lang="en-US" dirty="0" smtClean="0"/>
+                        <a:t> (</a:t>
+                      </a:r>
+                      <a:r>
+                        <a:rPr lang="en-US" sz="1350" b="0" i="1" u="none" strike="noStrike" kern="1200" dirty="0" smtClean="0">
+                          <a:solidFill>
+                            <a:schemeClr val="dk1"/>
+                          </a:solidFill>
+                          <a:effectLst/>
+                          <a:latin typeface="+mn-lt"/>
+                          <a:ea typeface="+mn-ea"/>
+                          <a:cs typeface="+mn-cs"/>
+                        </a:rPr>
+                        <a:t>Self-service</a:t>
+                      </a:r>
+                      <a:r>
+                        <a:rPr lang="en-US" dirty="0" smtClean="0"/>
+                        <a:t>).</a:t>
+                      </a:r>
+                      <a:endParaRPr lang="en-US" dirty="0"/>
+                    </a:p>
+                  </a:txBody>
+                  <a:tcPr/>
+                </a:tc>
+                <a:extLst>
+                  <a:ext uri="{0D108BD9-81ED-4DB2-BD59-A6C34878D82A}">
+                    <a16:rowId xmlns:a16="http://schemas.microsoft.com/office/drawing/2014/main" val="610236670"/>
+                  </a:ext>
+                </a:extLst>
+              </a:tr>
+              <a:tr h="370840">
+                <a:tc>
+                  <a:txBody>
+                    <a:bodyPr/>
+                    <a:lstStyle/>
+                    <a:p>
+                      <a:r>
+                        <a:rPr lang="en-US" dirty="0" smtClean="0"/>
+                        <a:t>Model </a:t>
+                      </a:r>
+                      <a:r>
+                        <a:rPr lang="en-US" dirty="0" err="1" smtClean="0"/>
+                        <a:t>Biaya</a:t>
+                      </a:r>
+                      <a:endParaRPr lang="en-US" dirty="0"/>
+                    </a:p>
+                  </a:txBody>
+                  <a:tcPr/>
+                </a:tc>
+                <a:tc>
+                  <a:txBody>
+                    <a:bodyPr/>
+                    <a:lstStyle/>
+                    <a:p>
+                      <a:r>
+                        <a:rPr lang="en-US" dirty="0" err="1" smtClean="0"/>
+                        <a:t>Investasi</a:t>
+                      </a:r>
+                      <a:r>
+                        <a:rPr lang="en-US" dirty="0" smtClean="0"/>
+                        <a:t> </a:t>
+                      </a:r>
+                      <a:r>
+                        <a:rPr lang="en-US" dirty="0" err="1" smtClean="0"/>
+                        <a:t>awal</a:t>
+                      </a:r>
+                      <a:r>
+                        <a:rPr lang="en-US" dirty="0" smtClean="0"/>
+                        <a:t> </a:t>
+                      </a:r>
+                      <a:r>
+                        <a:rPr lang="en-US" dirty="0" err="1" smtClean="0"/>
+                        <a:t>perangkat</a:t>
+                      </a:r>
+                      <a:r>
+                        <a:rPr lang="en-US" dirty="0" smtClean="0"/>
+                        <a:t> </a:t>
+                      </a:r>
+                      <a:r>
+                        <a:rPr lang="en-US" dirty="0" err="1" smtClean="0"/>
+                        <a:t>keras</a:t>
+                      </a:r>
+                      <a:r>
+                        <a:rPr lang="en-US" dirty="0" smtClean="0"/>
+                        <a:t> (</a:t>
+                      </a:r>
+                      <a:r>
+                        <a:rPr lang="en-US" sz="1350" b="0" i="1" u="none" strike="noStrike" kern="1200" dirty="0" smtClean="0">
+                          <a:solidFill>
+                            <a:schemeClr val="dk1"/>
+                          </a:solidFill>
+                          <a:effectLst/>
+                          <a:latin typeface="+mn-lt"/>
+                          <a:ea typeface="+mn-ea"/>
+                          <a:cs typeface="+mn-cs"/>
+                        </a:rPr>
+                        <a:t>Capital Expenditure</a:t>
+                      </a:r>
+                      <a:r>
+                        <a:rPr lang="en-US" dirty="0" smtClean="0"/>
+                        <a:t> / </a:t>
+                      </a:r>
+                      <a:r>
+                        <a:rPr lang="en-US" dirty="0" err="1" smtClean="0"/>
+                        <a:t>CapEx</a:t>
+                      </a:r>
+                      <a:r>
+                        <a:rPr lang="en-US" dirty="0" smtClean="0"/>
+                        <a:t>).</a:t>
+                      </a:r>
+                      <a:endParaRPr lang="en-US" dirty="0"/>
+                    </a:p>
+                  </a:txBody>
+                  <a:tcPr/>
+                </a:tc>
+                <a:tc>
+                  <a:txBody>
+                    <a:bodyPr/>
+                    <a:lstStyle/>
+                    <a:p>
+                      <a:r>
+                        <a:rPr lang="en-US" dirty="0" err="1" smtClean="0"/>
+                        <a:t>pemakaian</a:t>
+                      </a:r>
+                      <a:r>
+                        <a:rPr lang="en-US" dirty="0" smtClean="0"/>
+                        <a:t> </a:t>
+                      </a:r>
+                      <a:r>
+                        <a:rPr lang="en-US" dirty="0" err="1" smtClean="0"/>
+                        <a:t>variabel</a:t>
+                      </a:r>
+                      <a:r>
+                        <a:rPr lang="en-US" dirty="0" smtClean="0"/>
+                        <a:t> (</a:t>
+                      </a:r>
+                      <a:r>
+                        <a:rPr lang="en-US" sz="1350" b="0" i="1" u="none" strike="noStrike" kern="1200" dirty="0" smtClean="0">
+                          <a:solidFill>
+                            <a:schemeClr val="dk1"/>
+                          </a:solidFill>
+                          <a:effectLst/>
+                          <a:latin typeface="+mn-lt"/>
+                          <a:ea typeface="+mn-ea"/>
+                          <a:cs typeface="+mn-cs"/>
+                        </a:rPr>
+                        <a:t>Operational Expenditure</a:t>
+                      </a:r>
+                      <a:r>
+                        <a:rPr lang="en-US" dirty="0" smtClean="0"/>
+                        <a:t> / </a:t>
+                      </a:r>
+                      <a:r>
+                        <a:rPr lang="en-US" dirty="0" err="1" smtClean="0"/>
+                        <a:t>OpEx</a:t>
+                      </a:r>
+                      <a:r>
+                        <a:rPr lang="en-US" dirty="0" smtClean="0"/>
+                        <a:t> - </a:t>
+                      </a:r>
+                      <a:r>
+                        <a:rPr lang="en-US" sz="1350" b="0" i="1" u="none" strike="noStrike" kern="1200" dirty="0" smtClean="0">
+                          <a:solidFill>
+                            <a:schemeClr val="dk1"/>
+                          </a:solidFill>
+                          <a:effectLst/>
+                          <a:latin typeface="+mn-lt"/>
+                          <a:ea typeface="+mn-ea"/>
+                          <a:cs typeface="+mn-cs"/>
+                        </a:rPr>
+                        <a:t>Pay-as-you-go</a:t>
+                      </a:r>
+                      <a:r>
+                        <a:rPr lang="en-US" dirty="0" smtClean="0"/>
+                        <a:t>).</a:t>
+                      </a:r>
+                      <a:endParaRPr lang="en-US" dirty="0"/>
+                    </a:p>
+                  </a:txBody>
+                  <a:tcPr/>
+                </a:tc>
+                <a:extLst>
+                  <a:ext uri="{0D108BD9-81ED-4DB2-BD59-A6C34878D82A}">
+                    <a16:rowId xmlns:a16="http://schemas.microsoft.com/office/drawing/2014/main" val="2813788910"/>
+                  </a:ext>
+                </a:extLst>
+              </a:tr>
+              <a:tr h="370840">
+                <a:tc>
+                  <a:txBody>
+                    <a:bodyPr/>
+                    <a:lstStyle/>
+                    <a:p>
+                      <a:r>
+                        <a:rPr lang="en-US" dirty="0" err="1" smtClean="0"/>
+                        <a:t>Skalabilitas</a:t>
+                      </a:r>
+                      <a:endParaRPr lang="en-US" dirty="0"/>
+                    </a:p>
+                  </a:txBody>
+                  <a:tcPr/>
+                </a:tc>
+                <a:tc>
+                  <a:txBody>
+                    <a:bodyPr/>
+                    <a:lstStyle/>
+                    <a:p>
+                      <a:r>
+                        <a:rPr lang="es-ES" dirty="0" smtClean="0"/>
+                        <a:t>Manual dan </a:t>
+                      </a:r>
+                      <a:r>
+                        <a:rPr lang="es-ES" dirty="0" err="1" smtClean="0"/>
+                        <a:t>terbatas</a:t>
+                      </a:r>
+                      <a:r>
+                        <a:rPr lang="es-ES" dirty="0" smtClean="0"/>
+                        <a:t> pada </a:t>
+                      </a:r>
+                      <a:r>
+                        <a:rPr lang="es-ES" dirty="0" err="1" smtClean="0"/>
+                        <a:t>kapasitas</a:t>
+                      </a:r>
+                      <a:r>
+                        <a:rPr lang="es-ES" dirty="0" smtClean="0"/>
+                        <a:t> </a:t>
+                      </a:r>
+                      <a:r>
+                        <a:rPr lang="es-ES" sz="1350" b="0" i="1" u="none" strike="noStrike" kern="1200" dirty="0" smtClean="0">
+                          <a:solidFill>
+                            <a:schemeClr val="dk1"/>
+                          </a:solidFill>
+                          <a:effectLst/>
+                          <a:latin typeface="+mn-lt"/>
+                          <a:ea typeface="+mn-ea"/>
+                          <a:cs typeface="+mn-cs"/>
+                        </a:rPr>
+                        <a:t>hardware</a:t>
+                      </a:r>
+                      <a:r>
+                        <a:rPr lang="es-ES" dirty="0" smtClean="0"/>
+                        <a:t> </a:t>
+                      </a:r>
+                      <a:r>
+                        <a:rPr lang="es-ES" dirty="0" err="1" smtClean="0"/>
+                        <a:t>fisik</a:t>
+                      </a:r>
+                      <a:r>
+                        <a:rPr lang="es-ES" dirty="0" smtClean="0"/>
+                        <a:t> yang </a:t>
+                      </a:r>
+                      <a:r>
+                        <a:rPr lang="es-ES" dirty="0" err="1" smtClean="0"/>
+                        <a:t>dimiliki</a:t>
+                      </a:r>
+                      <a:r>
+                        <a:rPr lang="es-ES" dirty="0" smtClean="0"/>
+                        <a:t>.</a:t>
+                      </a:r>
+                      <a:endParaRPr lang="en-US" dirty="0"/>
+                    </a:p>
+                  </a:txBody>
+                  <a:tcPr/>
+                </a:tc>
+                <a:tc>
+                  <a:txBody>
+                    <a:bodyPr/>
+                    <a:lstStyle/>
+                    <a:p>
+                      <a:r>
+                        <a:rPr lang="en-US" dirty="0" err="1" smtClean="0"/>
+                        <a:t>Otomatis</a:t>
+                      </a:r>
+                      <a:r>
+                        <a:rPr lang="en-US" dirty="0" smtClean="0"/>
+                        <a:t> (</a:t>
+                      </a:r>
+                      <a:r>
+                        <a:rPr lang="en-US" sz="1350" b="0" i="1" u="none" strike="noStrike" kern="1200" dirty="0" smtClean="0">
+                          <a:solidFill>
+                            <a:schemeClr val="dk1"/>
+                          </a:solidFill>
+                          <a:effectLst/>
+                          <a:latin typeface="+mn-lt"/>
+                          <a:ea typeface="+mn-ea"/>
+                          <a:cs typeface="+mn-cs"/>
+                        </a:rPr>
+                        <a:t>Auto-scaling</a:t>
+                      </a:r>
+                      <a:r>
+                        <a:rPr lang="en-US" dirty="0" smtClean="0"/>
+                        <a:t>) </a:t>
+                      </a:r>
+                      <a:r>
+                        <a:rPr lang="en-US" dirty="0" err="1" smtClean="0"/>
+                        <a:t>dan</a:t>
+                      </a:r>
+                      <a:r>
+                        <a:rPr lang="en-US" dirty="0" smtClean="0"/>
+                        <a:t> </a:t>
+                      </a:r>
+                      <a:r>
+                        <a:rPr lang="en-US" dirty="0" err="1" smtClean="0"/>
+                        <a:t>hampir</a:t>
+                      </a:r>
+                      <a:r>
+                        <a:rPr lang="en-US" dirty="0" smtClean="0"/>
+                        <a:t> </a:t>
+                      </a:r>
+                      <a:r>
+                        <a:rPr lang="en-US" dirty="0" err="1" smtClean="0"/>
+                        <a:t>tidak</a:t>
+                      </a:r>
+                      <a:r>
+                        <a:rPr lang="en-US" dirty="0" smtClean="0"/>
+                        <a:t> </a:t>
+                      </a:r>
+                      <a:r>
+                        <a:rPr lang="en-US" dirty="0" err="1" smtClean="0"/>
+                        <a:t>terbatas</a:t>
+                      </a:r>
+                      <a:r>
+                        <a:rPr lang="en-US" dirty="0" smtClean="0"/>
+                        <a:t>.</a:t>
+                      </a:r>
+                      <a:endParaRPr lang="en-US" dirty="0"/>
+                    </a:p>
+                  </a:txBody>
+                  <a:tcPr/>
+                </a:tc>
+                <a:extLst>
+                  <a:ext uri="{0D108BD9-81ED-4DB2-BD59-A6C34878D82A}">
+                    <a16:rowId xmlns:a16="http://schemas.microsoft.com/office/drawing/2014/main" val="89489169"/>
+                  </a:ext>
+                </a:extLst>
+              </a:tr>
+              <a:tr h="370840">
+                <a:tc>
+                  <a:txBody>
+                    <a:bodyPr/>
+                    <a:lstStyle/>
+                    <a:p>
+                      <a:r>
+                        <a:rPr lang="en-US" dirty="0" err="1" smtClean="0"/>
+                        <a:t>Utama</a:t>
+                      </a:r>
+                      <a:endParaRPr lang="en-US" dirty="0"/>
+                    </a:p>
+                  </a:txBody>
+                  <a:tcPr/>
+                </a:tc>
+                <a:tc>
+                  <a:txBody>
+                    <a:bodyPr/>
+                    <a:lstStyle/>
+                    <a:p>
+                      <a:r>
+                        <a:rPr lang="fi-FI" dirty="0" smtClean="0"/>
+                        <a:t>Optimalisasi dan efisiensi penggunaan satu perangkat keras fisik.</a:t>
+                      </a:r>
+                      <a:endParaRPr lang="en-US" dirty="0"/>
+                    </a:p>
+                  </a:txBody>
+                  <a:tcPr/>
+                </a:tc>
+                <a:tc>
+                  <a:txBody>
+                    <a:bodyPr/>
+                    <a:lstStyle/>
+                    <a:p>
+                      <a:r>
+                        <a:rPr lang="en-US" dirty="0" err="1" smtClean="0"/>
+                        <a:t>Menyediakan</a:t>
+                      </a:r>
+                      <a:r>
+                        <a:rPr lang="en-US" dirty="0" smtClean="0"/>
+                        <a:t> </a:t>
+                      </a:r>
+                      <a:r>
+                        <a:rPr lang="en-US" dirty="0" err="1" smtClean="0"/>
+                        <a:t>layanan</a:t>
+                      </a:r>
+                      <a:r>
+                        <a:rPr lang="en-US" dirty="0" smtClean="0"/>
+                        <a:t> </a:t>
+                      </a:r>
+                      <a:r>
+                        <a:rPr lang="en-US" dirty="0" err="1" smtClean="0"/>
+                        <a:t>komputasi</a:t>
+                      </a:r>
+                      <a:r>
+                        <a:rPr lang="en-US" dirty="0" smtClean="0"/>
+                        <a:t> yang </a:t>
+                      </a:r>
+                      <a:r>
+                        <a:rPr lang="en-US" dirty="0" err="1" smtClean="0"/>
+                        <a:t>fleksibel</a:t>
+                      </a:r>
+                      <a:r>
+                        <a:rPr lang="en-US" dirty="0" smtClean="0"/>
+                        <a:t>, </a:t>
+                      </a:r>
+                      <a:r>
+                        <a:rPr lang="en-US" dirty="0" err="1" smtClean="0"/>
+                        <a:t>cepat</a:t>
+                      </a:r>
+                      <a:r>
+                        <a:rPr lang="en-US" dirty="0" smtClean="0"/>
+                        <a:t>, </a:t>
+                      </a:r>
+                      <a:r>
+                        <a:rPr lang="en-US" dirty="0" err="1" smtClean="0"/>
+                        <a:t>dan</a:t>
+                      </a:r>
+                      <a:r>
+                        <a:rPr lang="en-US" dirty="0" smtClean="0"/>
+                        <a:t> </a:t>
+                      </a:r>
+                      <a:r>
+                        <a:rPr lang="en-US" dirty="0" err="1" smtClean="0"/>
+                        <a:t>mudah</a:t>
+                      </a:r>
+                      <a:r>
+                        <a:rPr lang="en-US" dirty="0" smtClean="0"/>
+                        <a:t> </a:t>
+                      </a:r>
+                      <a:r>
+                        <a:rPr lang="en-US" dirty="0" err="1" smtClean="0"/>
+                        <a:t>diakses</a:t>
+                      </a:r>
+                      <a:r>
+                        <a:rPr lang="en-US" dirty="0" smtClean="0"/>
+                        <a:t> </a:t>
+                      </a:r>
+                      <a:r>
+                        <a:rPr lang="en-US" dirty="0" err="1" smtClean="0"/>
+                        <a:t>pengguna</a:t>
+                      </a:r>
+                      <a:r>
+                        <a:rPr lang="en-US" dirty="0" smtClean="0"/>
+                        <a:t>.</a:t>
+                      </a:r>
+                      <a:endParaRPr lang="en-US" dirty="0"/>
+                    </a:p>
+                  </a:txBody>
+                  <a:tcPr/>
+                </a:tc>
+                <a:extLst>
+                  <a:ext uri="{0D108BD9-81ED-4DB2-BD59-A6C34878D82A}">
+                    <a16:rowId xmlns:a16="http://schemas.microsoft.com/office/drawing/2014/main" val="3581771147"/>
+                  </a:ext>
+                </a:extLst>
+              </a:tr>
+            </a:tbl>
+          </a:graphicData>
+        </a:graphic>
+      </p:graphicFrame>
+    </p:spTree>
+    <p:extLst>
+      <p:ext uri="{BB962C8B-B14F-4D97-AF65-F5344CB8AC3E}">
+        <p14:creationId xmlns:p14="http://schemas.microsoft.com/office/powerpoint/2010/main" val="1826068797"/>
+      </p:ext>
+    </p:extLst>
+  </p:cSld>
+  <p:clrMapOvr>
+    <a:masterClrMapping/>
+  </p:clrMapOvr>
+  <p:timing>
+    <p:tnLst>
+      <p:par>
+        <p:cTn id="1" dur="indefinite" restart="never" nodeType="tmRoot"/>
+      </p:par>
+    </p:tnLst>
+  </p:timing>
+</p:sld>
+</file>
+
+<file path=ppt/slides/slide36.xml><?xml version="1.0" encoding="utf-8"?>
+<p:sld xmlns:a="http://schemas.openxmlformats.org/drawingml/2006/main" xmlns:r="http://schemas.openxmlformats.org/officeDocument/2006/relationships" xmlns:p="http://schemas.openxmlformats.org/presentationml/2006/main">
+  <p:cSld>
+    <p:spTree>
+      <p:nvGrpSpPr>
+        <p:cNvPr id="1" name=""/>
+        <p:cNvGrpSpPr/>
+        <p:nvPr/>
+      </p:nvGrpSpPr>
+      <p:grpSpPr>
+        <a:xfrm>
+          <a:off x="0" y="0"/>
+          <a:ext cx="0" cy="0"/>
+          <a:chOff x="0" y="0"/>
+          <a:chExt cx="0" cy="0"/>
+        </a:xfrm>
+      </p:grpSpPr>
+      <p:sp>
+        <p:nvSpPr>
+          <p:cNvPr id="95234" name="Title 1"/>
+          <p:cNvSpPr>
+            <a:spLocks noGrp="1"/>
+          </p:cNvSpPr>
+          <p:nvPr>
+            <p:ph type="title"/>
+          </p:nvPr>
+        </p:nvSpPr>
+        <p:spPr/>
+        <p:txBody>
+          <a:bodyPr/>
+          <a:lstStyle/>
+          <a:p>
+            <a:r>
+              <a:rPr lang="en-US" altLang="en-US" smtClean="0"/>
+              <a:t>.</a:t>
+            </a:r>
+          </a:p>
+        </p:txBody>
+      </p:sp>
+      <p:sp>
+        <p:nvSpPr>
+          <p:cNvPr id="4" name="Rectangle 3"/>
+          <p:cNvSpPr/>
+          <p:nvPr/>
+        </p:nvSpPr>
+        <p:spPr>
+          <a:xfrm>
+            <a:off x="0" y="0"/>
+            <a:ext cx="9144000" cy="914400"/>
+          </a:xfrm>
+          <a:prstGeom prst="rect">
+            <a:avLst/>
+          </a:prstGeom>
+          <a:solidFill>
+            <a:srgbClr val="E42452">
+              <a:alpha val="94118"/>
+            </a:srgbClr>
+          </a:solidFill>
+          <a:ln>
+            <a:noFill/>
+          </a:ln>
+        </p:spPr>
+        <p:style>
+          <a:lnRef idx="2">
+            <a:schemeClr val="accent1">
+              <a:shade val="50000"/>
+            </a:schemeClr>
+          </a:lnRef>
+          <a:fillRef idx="1">
+            <a:schemeClr val="accent1"/>
+          </a:fillRef>
+          <a:effectRef idx="0">
+            <a:schemeClr val="accent1"/>
+          </a:effectRef>
+          <a:fontRef idx="minor">
+            <a:schemeClr val="lt1"/>
+          </a:fontRef>
+        </p:style>
+        <p:txBody>
+          <a:bodyPr anchor="ctr"/>
+          <a:lstStyle/>
+          <a:p>
+            <a:pPr algn="ctr" eaLnBrk="1" hangingPunct="1">
+              <a:buFont typeface="Times New Roman" pitchFamily="16" charset="0"/>
+              <a:buNone/>
+              <a:defRPr/>
+            </a:pPr>
+            <a:r>
+              <a:rPr lang="en-US" sz="3600" dirty="0" smtClean="0"/>
+              <a:t>Architecture: Virtualization </a:t>
+            </a:r>
+            <a:r>
+              <a:rPr lang="en-US" sz="3600" dirty="0"/>
+              <a:t>and cloud computing</a:t>
+            </a:r>
+            <a:endParaRPr lang="en-US" sz="3600" b="1" dirty="0">
+              <a:solidFill>
+                <a:schemeClr val="bg1"/>
+              </a:solidFill>
+            </a:endParaRPr>
+          </a:p>
+        </p:txBody>
+      </p:sp>
+      <p:sp>
+        <p:nvSpPr>
+          <p:cNvPr id="95237" name="AutoShape 2" descr="http://image.slidesharecdn.com/virtualizationfinal-140301120900-phpapp02/95/introduction-to-virtualization-42-638.jpg?cb=1393697478"/>
+          <p:cNvSpPr>
+            <a:spLocks noChangeAspect="1" noChangeArrowheads="1"/>
+          </p:cNvSpPr>
+          <p:nvPr/>
+        </p:nvSpPr>
+        <p:spPr bwMode="auto">
+          <a:xfrm>
+            <a:off x="4498975" y="-144463"/>
+            <a:ext cx="304800" cy="304801"/>
+          </a:xfrm>
+          <a:prstGeom prst="rect">
+            <a:avLst/>
+          </a:prstGeom>
+          <a:noFill/>
+          <a:ln>
+            <a:noFill/>
+          </a:ln>
+          <a:extLst>
+            <a:ext uri="{909E8E84-426E-40DD-AFC4-6F175D3DCCD1}">
+              <a14:hiddenFill xmlns:a14="http://schemas.microsoft.com/office/drawing/2010/main">
+                <a:solidFill>
+                  <a:srgbClr val="FFFFFF"/>
+                </a:solidFill>
+              </a14:hiddenFill>
+            </a:ext>
+            <a:ext uri="{91240B29-F687-4F45-9708-019B960494DF}">
+              <a14:hiddenLine xmlns:a14="http://schemas.microsoft.com/office/drawing/2010/main" w="9525">
+                <a:solidFill>
+                  <a:srgbClr val="000000"/>
+                </a:solidFill>
+                <a:miter lim="800000"/>
+                <a:headEnd/>
+                <a:tailEnd/>
+              </a14:hiddenLine>
+            </a:ext>
+          </a:extLst>
+        </p:spPr>
+        <p:txBody>
+          <a:bodyPr/>
+          <a:lstStyle>
+            <a:lvl1pPr>
+              <a:lnSpc>
+                <a:spcPct val="90000"/>
+              </a:lnSpc>
+              <a:spcBef>
+                <a:spcPts val="750"/>
+              </a:spcBef>
+              <a:buFont typeface="Arial" panose="020B0604020202020204" pitchFamily="34" charset="0"/>
+              <a:buChar char="•"/>
+              <a:defRPr sz="2100">
+                <a:solidFill>
+                  <a:schemeClr val="tx1"/>
+                </a:solidFill>
+                <a:latin typeface="Calibri" panose="020F0502020204030204" pitchFamily="34" charset="0"/>
+              </a:defRPr>
+            </a:lvl1pPr>
+            <a:lvl2pPr marL="742950" indent="-285750">
+              <a:lnSpc>
+                <a:spcPct val="90000"/>
+              </a:lnSpc>
+              <a:spcBef>
+                <a:spcPts val="375"/>
+              </a:spcBef>
+              <a:buFont typeface="Arial" panose="020B0604020202020204" pitchFamily="34" charset="0"/>
+              <a:buChar char="•"/>
+              <a:defRPr>
+                <a:solidFill>
+                  <a:schemeClr val="tx1"/>
+                </a:solidFill>
+                <a:latin typeface="Calibri" panose="020F0502020204030204" pitchFamily="34" charset="0"/>
+              </a:defRPr>
+            </a:lvl2pPr>
+            <a:lvl3pPr marL="1143000" indent="-228600">
+              <a:lnSpc>
+                <a:spcPct val="90000"/>
+              </a:lnSpc>
+              <a:spcBef>
+                <a:spcPts val="375"/>
+              </a:spcBef>
+              <a:buFont typeface="Arial" panose="020B0604020202020204" pitchFamily="34" charset="0"/>
+              <a:buChar char="•"/>
+              <a:defRPr sz="1500">
+                <a:solidFill>
+                  <a:schemeClr val="tx1"/>
+                </a:solidFill>
+                <a:latin typeface="Calibri" panose="020F0502020204030204" pitchFamily="34" charset="0"/>
+              </a:defRPr>
+            </a:lvl3pPr>
+            <a:lvl4pPr marL="1600200" indent="-228600">
+              <a:lnSpc>
+                <a:spcPct val="90000"/>
+              </a:lnSpc>
+              <a:spcBef>
+                <a:spcPts val="375"/>
+              </a:spcBef>
+              <a:buFont typeface="Arial" panose="020B0604020202020204" pitchFamily="34" charset="0"/>
+              <a:buChar char="•"/>
+              <a:defRPr sz="1300">
+                <a:solidFill>
+                  <a:schemeClr val="tx1"/>
+                </a:solidFill>
+                <a:latin typeface="Calibri" panose="020F0502020204030204" pitchFamily="34" charset="0"/>
+              </a:defRPr>
+            </a:lvl4pPr>
+            <a:lvl5pPr marL="2057400" indent="-228600">
+              <a:lnSpc>
+                <a:spcPct val="90000"/>
+              </a:lnSpc>
+              <a:spcBef>
+                <a:spcPts val="375"/>
+              </a:spcBef>
+              <a:buFont typeface="Arial" panose="020B0604020202020204" pitchFamily="34" charset="0"/>
+              <a:buChar char="•"/>
+              <a:defRPr sz="1300">
+                <a:solidFill>
+                  <a:schemeClr val="tx1"/>
+                </a:solidFill>
+                <a:latin typeface="Calibri" panose="020F0502020204030204" pitchFamily="34" charset="0"/>
+              </a:defRPr>
+            </a:lvl5pPr>
+            <a:lvl6pPr marL="2514600" indent="-228600" fontAlgn="base">
+              <a:lnSpc>
+                <a:spcPct val="90000"/>
+              </a:lnSpc>
+              <a:spcBef>
+                <a:spcPts val="375"/>
+              </a:spcBef>
+              <a:spcAft>
+                <a:spcPct val="0"/>
+              </a:spcAft>
+              <a:buFont typeface="Arial" panose="020B0604020202020204" pitchFamily="34" charset="0"/>
+              <a:buChar char="•"/>
+              <a:defRPr sz="1300">
+                <a:solidFill>
+                  <a:schemeClr val="tx1"/>
+                </a:solidFill>
+                <a:latin typeface="Calibri" panose="020F0502020204030204" pitchFamily="34" charset="0"/>
+              </a:defRPr>
+            </a:lvl6pPr>
+            <a:lvl7pPr marL="2971800" indent="-228600" fontAlgn="base">
+              <a:lnSpc>
+                <a:spcPct val="90000"/>
+              </a:lnSpc>
+              <a:spcBef>
+                <a:spcPts val="375"/>
+              </a:spcBef>
+              <a:spcAft>
+                <a:spcPct val="0"/>
+              </a:spcAft>
+              <a:buFont typeface="Arial" panose="020B0604020202020204" pitchFamily="34" charset="0"/>
+              <a:buChar char="•"/>
+              <a:defRPr sz="1300">
+                <a:solidFill>
+                  <a:schemeClr val="tx1"/>
+                </a:solidFill>
+                <a:latin typeface="Calibri" panose="020F0502020204030204" pitchFamily="34" charset="0"/>
+              </a:defRPr>
+            </a:lvl7pPr>
+            <a:lvl8pPr marL="3429000" indent="-228600" fontAlgn="base">
+              <a:lnSpc>
+                <a:spcPct val="90000"/>
+              </a:lnSpc>
+              <a:spcBef>
+                <a:spcPts val="375"/>
+              </a:spcBef>
+              <a:spcAft>
+                <a:spcPct val="0"/>
+              </a:spcAft>
+              <a:buFont typeface="Arial" panose="020B0604020202020204" pitchFamily="34" charset="0"/>
+              <a:buChar char="•"/>
+              <a:defRPr sz="1300">
+                <a:solidFill>
+                  <a:schemeClr val="tx1"/>
+                </a:solidFill>
+                <a:latin typeface="Calibri" panose="020F0502020204030204" pitchFamily="34" charset="0"/>
+              </a:defRPr>
+            </a:lvl8pPr>
+            <a:lvl9pPr marL="3886200" indent="-228600" fontAlgn="base">
+              <a:lnSpc>
+                <a:spcPct val="90000"/>
+              </a:lnSpc>
+              <a:spcBef>
+                <a:spcPts val="375"/>
+              </a:spcBef>
+              <a:spcAft>
+                <a:spcPct val="0"/>
+              </a:spcAft>
+              <a:buFont typeface="Arial" panose="020B0604020202020204" pitchFamily="34" charset="0"/>
+              <a:buChar char="•"/>
+              <a:defRPr sz="1300">
+                <a:solidFill>
+                  <a:schemeClr val="tx1"/>
+                </a:solidFill>
+                <a:latin typeface="Calibri" panose="020F0502020204030204" pitchFamily="34" charset="0"/>
+              </a:defRPr>
+            </a:lvl9pPr>
+          </a:lstStyle>
+          <a:p>
+            <a:pPr algn="ctr" eaLnBrk="1" hangingPunct="1">
+              <a:lnSpc>
+                <a:spcPct val="100000"/>
+              </a:lnSpc>
+              <a:spcBef>
+                <a:spcPct val="0"/>
+              </a:spcBef>
+              <a:buFontTx/>
+              <a:buNone/>
+            </a:pPr>
+            <a:endParaRPr lang="en-US" altLang="en-US" sz="1800">
+              <a:latin typeface="Courier New" panose="02070309020205020404" pitchFamily="49" charset="0"/>
+            </a:endParaRPr>
+          </a:p>
+        </p:txBody>
+      </p:sp>
+      <p:graphicFrame>
+        <p:nvGraphicFramePr>
+          <p:cNvPr id="3" name="Table 2"/>
+          <p:cNvGraphicFramePr>
+            <a:graphicFrameLocks noGrp="1"/>
+          </p:cNvGraphicFramePr>
+          <p:nvPr/>
+        </p:nvGraphicFramePr>
+        <p:xfrm>
+          <a:off x="381000" y="1279525"/>
+          <a:ext cx="8534399" cy="3279140"/>
+        </p:xfrm>
+        <a:graphic>
+          <a:graphicData uri="http://schemas.openxmlformats.org/drawingml/2006/table">
+            <a:tbl>
+              <a:tblPr firstRow="1" bandRow="1">
+                <a:tableStyleId>{5C22544A-7EE6-4342-B048-85BDC9FD1C3A}</a:tableStyleId>
+              </a:tblPr>
+              <a:tblGrid>
+                <a:gridCol w="4038600">
+                  <a:extLst>
+                    <a:ext uri="{9D8B030D-6E8A-4147-A177-3AD203B41FA5}">
+                      <a16:colId xmlns:a16="http://schemas.microsoft.com/office/drawing/2014/main" val="3967548876"/>
+                    </a:ext>
+                  </a:extLst>
+                </a:gridCol>
+                <a:gridCol w="4495799">
+                  <a:extLst>
+                    <a:ext uri="{9D8B030D-6E8A-4147-A177-3AD203B41FA5}">
+                      <a16:colId xmlns:a16="http://schemas.microsoft.com/office/drawing/2014/main" val="1675884683"/>
+                    </a:ext>
+                  </a:extLst>
+                </a:gridCol>
+              </a:tblGrid>
+              <a:tr h="370840">
+                <a:tc>
+                  <a:txBody>
+                    <a:bodyPr/>
+                    <a:lstStyle/>
+                    <a:p>
+                      <a:r>
+                        <a:rPr lang="en-US" sz="1350" b="1" u="none" strike="noStrike" kern="1200" dirty="0" err="1" smtClean="0">
+                          <a:solidFill>
+                            <a:schemeClr val="lt1"/>
+                          </a:solidFill>
+                          <a:effectLst/>
+                          <a:latin typeface="+mn-lt"/>
+                          <a:ea typeface="+mn-ea"/>
+                          <a:cs typeface="+mn-cs"/>
+                        </a:rPr>
+                        <a:t>Virtualisasi</a:t>
+                      </a:r>
+                      <a:endParaRPr lang="en-US" sz="1350" b="1" u="none" strike="noStrike" kern="1200" dirty="0">
+                        <a:solidFill>
+                          <a:schemeClr val="lt1"/>
+                        </a:solidFill>
+                        <a:effectLst/>
+                        <a:latin typeface="+mn-lt"/>
+                        <a:ea typeface="+mn-ea"/>
+                        <a:cs typeface="+mn-cs"/>
+                      </a:endParaRPr>
+                    </a:p>
+                  </a:txBody>
+                  <a:tcPr/>
+                </a:tc>
+                <a:tc>
+                  <a:txBody>
+                    <a:bodyPr/>
+                    <a:lstStyle/>
+                    <a:p>
+                      <a:r>
+                        <a:rPr lang="en-US" dirty="0" smtClean="0"/>
+                        <a:t>Cloud Infrastructure</a:t>
+                      </a:r>
+                      <a:endParaRPr lang="en-US" dirty="0"/>
+                    </a:p>
+                  </a:txBody>
+                  <a:tcPr/>
+                </a:tc>
+                <a:extLst>
+                  <a:ext uri="{0D108BD9-81ED-4DB2-BD59-A6C34878D82A}">
+                    <a16:rowId xmlns:a16="http://schemas.microsoft.com/office/drawing/2014/main" val="182503245"/>
+                  </a:ext>
+                </a:extLst>
+              </a:tr>
+              <a:tr h="370840">
+                <a:tc>
+                  <a:txBody>
+                    <a:bodyPr/>
+                    <a:lstStyle/>
+                    <a:p>
+                      <a:r>
+                        <a:rPr lang="en-US" sz="1350" b="1" u="none" strike="noStrike" kern="1200" dirty="0" smtClean="0">
+                          <a:solidFill>
+                            <a:schemeClr val="dk1"/>
+                          </a:solidFill>
+                          <a:effectLst/>
+                          <a:latin typeface="+mn-lt"/>
+                          <a:ea typeface="+mn-ea"/>
+                          <a:cs typeface="+mn-cs"/>
+                        </a:rPr>
+                        <a:t>Hypervisor:</a:t>
+                      </a:r>
+                      <a:r>
+                        <a:rPr lang="en-US" dirty="0" smtClean="0"/>
+                        <a:t> </a:t>
+                      </a:r>
+                      <a:r>
+                        <a:rPr lang="en-US" dirty="0" err="1" smtClean="0"/>
+                        <a:t>Menggunakan</a:t>
+                      </a:r>
+                      <a:r>
+                        <a:rPr lang="en-US" dirty="0" smtClean="0"/>
+                        <a:t> </a:t>
+                      </a:r>
+                      <a:r>
+                        <a:rPr lang="en-US" dirty="0" err="1" smtClean="0"/>
+                        <a:t>perangkat</a:t>
+                      </a:r>
+                      <a:r>
+                        <a:rPr lang="en-US" dirty="0" smtClean="0"/>
+                        <a:t> </a:t>
+                      </a:r>
+                      <a:r>
+                        <a:rPr lang="en-US" dirty="0" err="1" smtClean="0"/>
+                        <a:t>lunak</a:t>
+                      </a:r>
+                      <a:r>
+                        <a:rPr lang="en-US" dirty="0" smtClean="0"/>
+                        <a:t> </a:t>
+                      </a:r>
+                      <a:r>
+                        <a:rPr lang="en-US" dirty="0" err="1" smtClean="0"/>
+                        <a:t>khusus</a:t>
+                      </a:r>
+                      <a:r>
+                        <a:rPr lang="en-US" dirty="0" smtClean="0"/>
+                        <a:t> (</a:t>
+                      </a:r>
+                      <a:r>
+                        <a:rPr lang="en-US" dirty="0" err="1" smtClean="0"/>
+                        <a:t>seperti</a:t>
+                      </a:r>
+                      <a:r>
+                        <a:rPr lang="en-US" dirty="0" smtClean="0"/>
+                        <a:t> VMware, Hyper-V, </a:t>
+                      </a:r>
+                      <a:r>
+                        <a:rPr lang="en-US" dirty="0" err="1" smtClean="0"/>
+                        <a:t>atau</a:t>
+                      </a:r>
+                      <a:r>
+                        <a:rPr lang="en-US" dirty="0" smtClean="0"/>
+                        <a:t> KVM) yang </a:t>
+                      </a:r>
+                      <a:r>
+                        <a:rPr lang="en-US" dirty="0" err="1" smtClean="0"/>
+                        <a:t>dipasang</a:t>
+                      </a:r>
+                      <a:r>
+                        <a:rPr lang="en-US" dirty="0" smtClean="0"/>
+                        <a:t> </a:t>
+                      </a:r>
+                      <a:r>
+                        <a:rPr lang="en-US" dirty="0" err="1" smtClean="0"/>
+                        <a:t>langsung</a:t>
+                      </a:r>
+                      <a:r>
+                        <a:rPr lang="en-US" dirty="0" smtClean="0"/>
+                        <a:t> di </a:t>
+                      </a:r>
+                      <a:r>
+                        <a:rPr lang="en-US" dirty="0" err="1" smtClean="0"/>
+                        <a:t>atas</a:t>
+                      </a:r>
+                      <a:r>
+                        <a:rPr lang="en-US" dirty="0" smtClean="0"/>
+                        <a:t> </a:t>
+                      </a:r>
+                      <a:r>
+                        <a:rPr lang="en-US" sz="1350" b="0" i="1" u="none" strike="noStrike" kern="1200" dirty="0" smtClean="0">
+                          <a:solidFill>
+                            <a:schemeClr val="dk1"/>
+                          </a:solidFill>
+                          <a:effectLst/>
+                          <a:latin typeface="+mn-lt"/>
+                          <a:ea typeface="+mn-ea"/>
+                          <a:cs typeface="+mn-cs"/>
+                        </a:rPr>
+                        <a:t>hardware</a:t>
+                      </a:r>
+                      <a:r>
+                        <a:rPr lang="en-US" dirty="0" smtClean="0"/>
+                        <a:t> </a:t>
+                      </a:r>
+                      <a:r>
+                        <a:rPr lang="en-US" dirty="0" err="1" smtClean="0"/>
+                        <a:t>untuk</a:t>
+                      </a:r>
+                      <a:r>
+                        <a:rPr lang="en-US" dirty="0" smtClean="0"/>
+                        <a:t> </a:t>
+                      </a:r>
+                      <a:r>
+                        <a:rPr lang="en-US" dirty="0" err="1" smtClean="0"/>
+                        <a:t>membuat</a:t>
+                      </a:r>
+                      <a:r>
+                        <a:rPr lang="en-US" dirty="0" smtClean="0"/>
+                        <a:t> </a:t>
+                      </a:r>
+                      <a:r>
+                        <a:rPr lang="en-US" dirty="0" err="1" smtClean="0"/>
+                        <a:t>lapisan</a:t>
+                      </a:r>
+                      <a:r>
+                        <a:rPr lang="en-US" dirty="0" smtClean="0"/>
+                        <a:t> virtual.</a:t>
+                      </a:r>
+                      <a:endParaRPr lang="en-US" dirty="0"/>
+                    </a:p>
+                  </a:txBody>
+                  <a:tcPr/>
+                </a:tc>
+                <a:tc>
+                  <a:txBody>
+                    <a:bodyPr/>
+                    <a:lstStyle/>
+                    <a:p>
+                      <a:r>
+                        <a:rPr lang="en-US" sz="1350" b="1" u="none" strike="noStrike" kern="1200" dirty="0" err="1" smtClean="0">
+                          <a:solidFill>
+                            <a:schemeClr val="dk1"/>
+                          </a:solidFill>
+                          <a:effectLst/>
+                          <a:latin typeface="+mn-lt"/>
+                          <a:ea typeface="+mn-ea"/>
+                          <a:cs typeface="+mn-cs"/>
+                        </a:rPr>
+                        <a:t>Layanan</a:t>
+                      </a:r>
+                      <a:r>
+                        <a:rPr lang="en-US" sz="1350" b="1" u="none" strike="noStrike" kern="1200" dirty="0" smtClean="0">
+                          <a:solidFill>
+                            <a:schemeClr val="dk1"/>
+                          </a:solidFill>
+                          <a:effectLst/>
+                          <a:latin typeface="+mn-lt"/>
+                          <a:ea typeface="+mn-ea"/>
+                          <a:cs typeface="+mn-cs"/>
+                        </a:rPr>
+                        <a:t> </a:t>
+                      </a:r>
+                      <a:r>
+                        <a:rPr lang="en-US" sz="1350" b="1" u="none" strike="noStrike" kern="1200" dirty="0" err="1" smtClean="0">
+                          <a:solidFill>
+                            <a:schemeClr val="dk1"/>
+                          </a:solidFill>
+                          <a:effectLst/>
+                          <a:latin typeface="+mn-lt"/>
+                          <a:ea typeface="+mn-ea"/>
+                          <a:cs typeface="+mn-cs"/>
+                        </a:rPr>
+                        <a:t>Mandiri</a:t>
+                      </a:r>
+                      <a:r>
+                        <a:rPr lang="en-US" sz="1350" b="1" u="none" strike="noStrike" kern="1200" dirty="0" smtClean="0">
+                          <a:solidFill>
+                            <a:schemeClr val="dk1"/>
+                          </a:solidFill>
+                          <a:effectLst/>
+                          <a:latin typeface="+mn-lt"/>
+                          <a:ea typeface="+mn-ea"/>
+                          <a:cs typeface="+mn-cs"/>
+                        </a:rPr>
+                        <a:t> (</a:t>
+                      </a:r>
+                      <a:r>
+                        <a:rPr lang="en-US" sz="1350" b="1" i="1" u="none" strike="noStrike" kern="1200" dirty="0" smtClean="0">
+                          <a:solidFill>
+                            <a:schemeClr val="dk1"/>
+                          </a:solidFill>
+                          <a:effectLst/>
+                          <a:latin typeface="+mn-lt"/>
+                          <a:ea typeface="+mn-ea"/>
+                          <a:cs typeface="+mn-cs"/>
+                        </a:rPr>
+                        <a:t>Self-Service</a:t>
+                      </a:r>
+                      <a:r>
+                        <a:rPr lang="en-US" sz="1350" b="1" u="none" strike="noStrike" kern="1200" dirty="0" smtClean="0">
+                          <a:solidFill>
+                            <a:schemeClr val="dk1"/>
+                          </a:solidFill>
+                          <a:effectLst/>
+                          <a:latin typeface="+mn-lt"/>
+                          <a:ea typeface="+mn-ea"/>
+                          <a:cs typeface="+mn-cs"/>
+                        </a:rPr>
+                        <a:t>):</a:t>
+                      </a:r>
+                      <a:r>
+                        <a:rPr lang="en-US" dirty="0" smtClean="0"/>
+                        <a:t> </a:t>
+                      </a:r>
+                      <a:r>
+                        <a:rPr lang="en-US" dirty="0" err="1" smtClean="0"/>
+                        <a:t>Pengguna</a:t>
+                      </a:r>
+                      <a:r>
+                        <a:rPr lang="en-US" dirty="0" smtClean="0"/>
+                        <a:t> </a:t>
+                      </a:r>
+                      <a:r>
+                        <a:rPr lang="en-US" dirty="0" err="1" smtClean="0"/>
+                        <a:t>bisa</a:t>
+                      </a:r>
+                      <a:r>
+                        <a:rPr lang="en-US" dirty="0" smtClean="0"/>
+                        <a:t> </a:t>
+                      </a:r>
+                      <a:r>
+                        <a:rPr lang="en-US" dirty="0" err="1" smtClean="0"/>
+                        <a:t>langsung</a:t>
+                      </a:r>
+                      <a:r>
+                        <a:rPr lang="en-US" dirty="0" smtClean="0"/>
+                        <a:t> </a:t>
+                      </a:r>
+                      <a:r>
+                        <a:rPr lang="en-US" dirty="0" err="1" smtClean="0"/>
+                        <a:t>menyewa</a:t>
+                      </a:r>
+                      <a:r>
+                        <a:rPr lang="en-US" dirty="0" smtClean="0"/>
+                        <a:t> server, </a:t>
+                      </a:r>
+                      <a:r>
+                        <a:rPr lang="en-US" dirty="0" err="1" smtClean="0"/>
+                        <a:t>penyimpanan</a:t>
+                      </a:r>
+                      <a:r>
+                        <a:rPr lang="en-US" dirty="0" smtClean="0"/>
+                        <a:t>, </a:t>
+                      </a:r>
+                      <a:r>
+                        <a:rPr lang="en-US" dirty="0" err="1" smtClean="0"/>
+                        <a:t>atau</a:t>
+                      </a:r>
+                      <a:r>
+                        <a:rPr lang="en-US" dirty="0" smtClean="0"/>
+                        <a:t> </a:t>
+                      </a:r>
+                      <a:r>
+                        <a:rPr lang="en-US" dirty="0" err="1" smtClean="0"/>
+                        <a:t>aplikasi</a:t>
+                      </a:r>
+                      <a:r>
+                        <a:rPr lang="en-US" dirty="0" smtClean="0"/>
+                        <a:t> </a:t>
+                      </a:r>
+                      <a:r>
+                        <a:rPr lang="en-US" dirty="0" err="1" smtClean="0"/>
+                        <a:t>lewat</a:t>
+                      </a:r>
+                      <a:r>
+                        <a:rPr lang="en-US" dirty="0" smtClean="0"/>
+                        <a:t> </a:t>
+                      </a:r>
+                      <a:r>
+                        <a:rPr lang="en-US" sz="1350" b="0" i="1" u="none" strike="noStrike" kern="1200" dirty="0" smtClean="0">
+                          <a:solidFill>
+                            <a:schemeClr val="dk1"/>
+                          </a:solidFill>
+                          <a:effectLst/>
+                          <a:latin typeface="+mn-lt"/>
+                          <a:ea typeface="+mn-ea"/>
+                          <a:cs typeface="+mn-cs"/>
+                        </a:rPr>
+                        <a:t>dashboard</a:t>
+                      </a:r>
+                      <a:r>
+                        <a:rPr lang="en-US" dirty="0" smtClean="0"/>
+                        <a:t> (</a:t>
+                      </a:r>
+                      <a:r>
+                        <a:rPr lang="en-US" dirty="0" err="1" smtClean="0"/>
+                        <a:t>seperti</a:t>
+                      </a:r>
+                      <a:r>
+                        <a:rPr lang="en-US" dirty="0" smtClean="0"/>
+                        <a:t> AWS, Google Cloud, </a:t>
+                      </a:r>
+                      <a:r>
+                        <a:rPr lang="en-US" dirty="0" err="1" smtClean="0"/>
+                        <a:t>atau</a:t>
+                      </a:r>
+                      <a:r>
+                        <a:rPr lang="en-US" dirty="0" smtClean="0"/>
+                        <a:t> Azure) </a:t>
+                      </a:r>
+                      <a:r>
+                        <a:rPr lang="en-US" dirty="0" err="1" smtClean="0"/>
+                        <a:t>tanpa</a:t>
+                      </a:r>
+                      <a:r>
+                        <a:rPr lang="en-US" dirty="0" smtClean="0"/>
+                        <a:t> </a:t>
+                      </a:r>
+                      <a:r>
+                        <a:rPr lang="en-US" dirty="0" err="1" smtClean="0"/>
+                        <a:t>bantuan</a:t>
+                      </a:r>
+                      <a:r>
+                        <a:rPr lang="en-US" dirty="0" smtClean="0"/>
+                        <a:t> admin TI.</a:t>
+                      </a:r>
+                      <a:endParaRPr lang="en-US" dirty="0"/>
+                    </a:p>
+                  </a:txBody>
+                  <a:tcPr/>
+                </a:tc>
+                <a:extLst>
+                  <a:ext uri="{0D108BD9-81ED-4DB2-BD59-A6C34878D82A}">
+                    <a16:rowId xmlns:a16="http://schemas.microsoft.com/office/drawing/2014/main" val="3397643251"/>
+                  </a:ext>
+                </a:extLst>
+              </a:tr>
+              <a:tr h="370840">
+                <a:tc>
+                  <a:txBody>
+                    <a:bodyPr/>
+                    <a:lstStyle/>
+                    <a:p>
+                      <a:r>
+                        <a:rPr lang="en-US" sz="1350" b="1" u="none" strike="noStrike" kern="1200" dirty="0" err="1" smtClean="0">
+                          <a:solidFill>
+                            <a:schemeClr val="dk1"/>
+                          </a:solidFill>
+                          <a:effectLst/>
+                          <a:latin typeface="+mn-lt"/>
+                          <a:ea typeface="+mn-ea"/>
+                          <a:cs typeface="+mn-cs"/>
+                        </a:rPr>
+                        <a:t>Manajemen</a:t>
+                      </a:r>
+                      <a:r>
+                        <a:rPr lang="en-US" sz="1350" b="1" u="none" strike="noStrike" kern="1200" dirty="0" smtClean="0">
+                          <a:solidFill>
+                            <a:schemeClr val="dk1"/>
+                          </a:solidFill>
+                          <a:effectLst/>
+                          <a:latin typeface="+mn-lt"/>
+                          <a:ea typeface="+mn-ea"/>
+                          <a:cs typeface="+mn-cs"/>
+                        </a:rPr>
+                        <a:t> </a:t>
+                      </a:r>
+                      <a:r>
+                        <a:rPr lang="en-US" sz="1350" b="1" u="none" strike="noStrike" kern="1200" dirty="0" err="1" smtClean="0">
+                          <a:solidFill>
+                            <a:schemeClr val="dk1"/>
+                          </a:solidFill>
+                          <a:effectLst/>
+                          <a:latin typeface="+mn-lt"/>
+                          <a:ea typeface="+mn-ea"/>
+                          <a:cs typeface="+mn-cs"/>
+                        </a:rPr>
+                        <a:t>Terpusat</a:t>
+                      </a:r>
+                      <a:r>
+                        <a:rPr lang="en-US" sz="1350" b="1" u="none" strike="noStrike" kern="1200" dirty="0" smtClean="0">
+                          <a:solidFill>
+                            <a:schemeClr val="dk1"/>
+                          </a:solidFill>
+                          <a:effectLst/>
+                          <a:latin typeface="+mn-lt"/>
+                          <a:ea typeface="+mn-ea"/>
+                          <a:cs typeface="+mn-cs"/>
+                        </a:rPr>
+                        <a:t>:</a:t>
+                      </a:r>
+                      <a:r>
+                        <a:rPr lang="en-US" sz="1350" b="0" u="none" strike="noStrike" kern="1200" dirty="0" smtClean="0">
+                          <a:solidFill>
+                            <a:schemeClr val="dk1"/>
+                          </a:solidFill>
+                          <a:effectLst/>
+                          <a:latin typeface="+mn-lt"/>
+                          <a:ea typeface="+mn-ea"/>
+                          <a:cs typeface="+mn-cs"/>
+                        </a:rPr>
+                        <a:t> Admin TI </a:t>
+                      </a:r>
+                      <a:r>
+                        <a:rPr lang="en-US" sz="1350" b="0" u="none" strike="noStrike" kern="1200" dirty="0" err="1" smtClean="0">
+                          <a:solidFill>
+                            <a:schemeClr val="dk1"/>
+                          </a:solidFill>
+                          <a:effectLst/>
+                          <a:latin typeface="+mn-lt"/>
+                          <a:ea typeface="+mn-ea"/>
+                          <a:cs typeface="+mn-cs"/>
+                        </a:rPr>
+                        <a:t>mengontrol</a:t>
+                      </a:r>
+                      <a:r>
+                        <a:rPr lang="en-US" sz="1350" b="0" u="none" strike="noStrike" kern="1200" dirty="0" smtClean="0">
+                          <a:solidFill>
+                            <a:schemeClr val="dk1"/>
+                          </a:solidFill>
+                          <a:effectLst/>
+                          <a:latin typeface="+mn-lt"/>
+                          <a:ea typeface="+mn-ea"/>
+                          <a:cs typeface="+mn-cs"/>
+                        </a:rPr>
+                        <a:t> </a:t>
+                      </a:r>
+                      <a:r>
+                        <a:rPr lang="en-US" sz="1350" b="0" u="none" strike="noStrike" kern="1200" dirty="0" err="1" smtClean="0">
+                          <a:solidFill>
+                            <a:schemeClr val="dk1"/>
+                          </a:solidFill>
+                          <a:effectLst/>
+                          <a:latin typeface="+mn-lt"/>
+                          <a:ea typeface="+mn-ea"/>
+                          <a:cs typeface="+mn-cs"/>
+                        </a:rPr>
+                        <a:t>alokasi</a:t>
+                      </a:r>
+                      <a:r>
+                        <a:rPr lang="en-US" sz="1350" b="0" u="none" strike="noStrike" kern="1200" dirty="0" smtClean="0">
+                          <a:solidFill>
+                            <a:schemeClr val="dk1"/>
+                          </a:solidFill>
+                          <a:effectLst/>
+                          <a:latin typeface="+mn-lt"/>
+                          <a:ea typeface="+mn-ea"/>
+                          <a:cs typeface="+mn-cs"/>
+                        </a:rPr>
+                        <a:t> CPU, RAM, </a:t>
+                      </a:r>
+                      <a:r>
+                        <a:rPr lang="en-US" sz="1350" b="0" u="none" strike="noStrike" kern="1200" dirty="0" err="1" smtClean="0">
+                          <a:solidFill>
+                            <a:schemeClr val="dk1"/>
+                          </a:solidFill>
+                          <a:effectLst/>
+                          <a:latin typeface="+mn-lt"/>
+                          <a:ea typeface="+mn-ea"/>
+                          <a:cs typeface="+mn-cs"/>
+                        </a:rPr>
+                        <a:t>dan</a:t>
+                      </a:r>
+                      <a:r>
+                        <a:rPr lang="en-US" sz="1350" b="0" u="none" strike="noStrike" kern="1200" dirty="0" smtClean="0">
+                          <a:solidFill>
+                            <a:schemeClr val="dk1"/>
+                          </a:solidFill>
+                          <a:effectLst/>
+                          <a:latin typeface="+mn-lt"/>
+                          <a:ea typeface="+mn-ea"/>
+                          <a:cs typeface="+mn-cs"/>
+                        </a:rPr>
+                        <a:t> </a:t>
+                      </a:r>
+                      <a:r>
+                        <a:rPr lang="en-US" sz="1350" b="0" u="none" strike="noStrike" kern="1200" dirty="0" err="1" smtClean="0">
+                          <a:solidFill>
+                            <a:schemeClr val="dk1"/>
+                          </a:solidFill>
+                          <a:effectLst/>
+                          <a:latin typeface="+mn-lt"/>
+                          <a:ea typeface="+mn-ea"/>
+                          <a:cs typeface="+mn-cs"/>
+                        </a:rPr>
+                        <a:t>penyimpanan</a:t>
+                      </a:r>
+                      <a:r>
+                        <a:rPr lang="en-US" sz="1350" b="0" u="none" strike="noStrike" kern="1200" dirty="0" smtClean="0">
+                          <a:solidFill>
+                            <a:schemeClr val="dk1"/>
+                          </a:solidFill>
+                          <a:effectLst/>
+                          <a:latin typeface="+mn-lt"/>
+                          <a:ea typeface="+mn-ea"/>
+                          <a:cs typeface="+mn-cs"/>
+                        </a:rPr>
+                        <a:t> </a:t>
+                      </a:r>
+                      <a:r>
+                        <a:rPr lang="en-US" sz="1350" b="0" u="none" strike="noStrike" kern="1200" dirty="0" err="1" smtClean="0">
+                          <a:solidFill>
+                            <a:schemeClr val="dk1"/>
+                          </a:solidFill>
+                          <a:effectLst/>
+                          <a:latin typeface="+mn-lt"/>
+                          <a:ea typeface="+mn-ea"/>
+                          <a:cs typeface="+mn-cs"/>
+                        </a:rPr>
+                        <a:t>ke</a:t>
+                      </a:r>
+                      <a:r>
+                        <a:rPr lang="en-US" sz="1350" b="0" u="none" strike="noStrike" kern="1200" dirty="0" smtClean="0">
+                          <a:solidFill>
+                            <a:schemeClr val="dk1"/>
+                          </a:solidFill>
+                          <a:effectLst/>
+                          <a:latin typeface="+mn-lt"/>
+                          <a:ea typeface="+mn-ea"/>
+                          <a:cs typeface="+mn-cs"/>
+                        </a:rPr>
+                        <a:t> </a:t>
+                      </a:r>
+                      <a:r>
+                        <a:rPr lang="en-US" sz="1350" b="0" u="none" strike="noStrike" kern="1200" dirty="0" err="1" smtClean="0">
+                          <a:solidFill>
+                            <a:schemeClr val="dk1"/>
+                          </a:solidFill>
+                          <a:effectLst/>
+                          <a:latin typeface="+mn-lt"/>
+                          <a:ea typeface="+mn-ea"/>
+                          <a:cs typeface="+mn-cs"/>
+                        </a:rPr>
+                        <a:t>setiap</a:t>
+                      </a:r>
+                      <a:r>
+                        <a:rPr lang="en-US" sz="1350" b="0" u="none" strike="noStrike" kern="1200" dirty="0" smtClean="0">
+                          <a:solidFill>
+                            <a:schemeClr val="dk1"/>
+                          </a:solidFill>
+                          <a:effectLst/>
+                          <a:latin typeface="+mn-lt"/>
+                          <a:ea typeface="+mn-ea"/>
+                          <a:cs typeface="+mn-cs"/>
+                        </a:rPr>
+                        <a:t> </a:t>
+                      </a:r>
+                      <a:r>
+                        <a:rPr lang="en-US" sz="1350" b="0" i="1" u="none" strike="noStrike" kern="1200" dirty="0" smtClean="0">
+                          <a:solidFill>
+                            <a:schemeClr val="dk1"/>
+                          </a:solidFill>
+                          <a:effectLst/>
+                          <a:latin typeface="+mn-lt"/>
+                          <a:ea typeface="+mn-ea"/>
+                          <a:cs typeface="+mn-cs"/>
+                        </a:rPr>
+                        <a:t>Virtual Machine</a:t>
+                      </a:r>
+                      <a:r>
+                        <a:rPr lang="en-US" sz="1350" b="0" u="none" strike="noStrike" kern="1200" dirty="0" smtClean="0">
+                          <a:solidFill>
+                            <a:schemeClr val="dk1"/>
+                          </a:solidFill>
+                          <a:effectLst/>
+                          <a:latin typeface="+mn-lt"/>
+                          <a:ea typeface="+mn-ea"/>
+                          <a:cs typeface="+mn-cs"/>
+                        </a:rPr>
+                        <a:t> (VM) </a:t>
+                      </a:r>
+                      <a:r>
+                        <a:rPr lang="en-US" sz="1350" b="0" u="none" strike="noStrike" kern="1200" dirty="0" err="1" smtClean="0">
+                          <a:solidFill>
+                            <a:schemeClr val="dk1"/>
+                          </a:solidFill>
+                          <a:effectLst/>
+                          <a:latin typeface="+mn-lt"/>
+                          <a:ea typeface="+mn-ea"/>
+                          <a:cs typeface="+mn-cs"/>
+                        </a:rPr>
+                        <a:t>secara</a:t>
+                      </a:r>
+                      <a:r>
+                        <a:rPr lang="en-US" sz="1350" b="0" u="none" strike="noStrike" kern="1200" dirty="0" smtClean="0">
+                          <a:solidFill>
+                            <a:schemeClr val="dk1"/>
+                          </a:solidFill>
+                          <a:effectLst/>
+                          <a:latin typeface="+mn-lt"/>
+                          <a:ea typeface="+mn-ea"/>
+                          <a:cs typeface="+mn-cs"/>
+                        </a:rPr>
+                        <a:t> manual.</a:t>
+                      </a:r>
+                      <a:endParaRPr lang="en-US" dirty="0"/>
+                    </a:p>
+                  </a:txBody>
+                  <a:tcPr/>
+                </a:tc>
+                <a:tc>
+                  <a:txBody>
+                    <a:bodyPr/>
+                    <a:lstStyle/>
+                    <a:p>
+                      <a:r>
+                        <a:rPr lang="en-US" sz="1350" b="1" u="none" strike="noStrike" kern="1200" dirty="0" smtClean="0">
+                          <a:solidFill>
+                            <a:schemeClr val="dk1"/>
+                          </a:solidFill>
+                          <a:effectLst/>
+                          <a:latin typeface="+mn-lt"/>
+                          <a:ea typeface="+mn-ea"/>
+                          <a:cs typeface="+mn-cs"/>
+                        </a:rPr>
+                        <a:t>Multi-tenancy:</a:t>
+                      </a:r>
+                      <a:endParaRPr lang="en-US" sz="1350" b="0" u="none" strike="noStrike" kern="1200" dirty="0" smtClean="0">
+                        <a:solidFill>
+                          <a:schemeClr val="dk1"/>
+                        </a:solidFill>
+                        <a:effectLst/>
+                        <a:latin typeface="+mn-lt"/>
+                        <a:ea typeface="+mn-ea"/>
+                        <a:cs typeface="+mn-cs"/>
+                      </a:endParaRPr>
+                    </a:p>
+                    <a:p>
+                      <a:r>
+                        <a:rPr lang="en-US" dirty="0" err="1" smtClean="0"/>
+                        <a:t>Satu</a:t>
+                      </a:r>
+                      <a:r>
+                        <a:rPr lang="en-US" dirty="0" smtClean="0"/>
+                        <a:t> </a:t>
+                      </a:r>
+                      <a:r>
+                        <a:rPr lang="en-US" dirty="0" err="1" smtClean="0"/>
+                        <a:t>infrastruktur</a:t>
+                      </a:r>
+                      <a:r>
+                        <a:rPr lang="en-US" dirty="0" smtClean="0"/>
+                        <a:t> </a:t>
+                      </a:r>
+                      <a:r>
+                        <a:rPr lang="en-US" dirty="0" err="1" smtClean="0"/>
+                        <a:t>fisik</a:t>
+                      </a:r>
+                      <a:r>
+                        <a:rPr lang="en-US" dirty="0" smtClean="0"/>
+                        <a:t> </a:t>
+                      </a:r>
+                      <a:r>
+                        <a:rPr lang="en-US" dirty="0" err="1" smtClean="0"/>
+                        <a:t>besar</a:t>
+                      </a:r>
+                      <a:r>
+                        <a:rPr lang="en-US" dirty="0" smtClean="0"/>
+                        <a:t> </a:t>
+                      </a:r>
+                      <a:r>
+                        <a:rPr lang="en-US" dirty="0" err="1" smtClean="0"/>
+                        <a:t>dibagi</a:t>
+                      </a:r>
+                      <a:r>
+                        <a:rPr lang="en-US" dirty="0" smtClean="0"/>
+                        <a:t> </a:t>
+                      </a:r>
+                      <a:r>
+                        <a:rPr lang="en-US" dirty="0" err="1" smtClean="0"/>
+                        <a:t>secara</a:t>
+                      </a:r>
+                      <a:r>
+                        <a:rPr lang="en-US" dirty="0" smtClean="0"/>
+                        <a:t> </a:t>
+                      </a:r>
+                      <a:r>
+                        <a:rPr lang="en-US" dirty="0" err="1" smtClean="0"/>
+                        <a:t>aman</a:t>
+                      </a:r>
+                      <a:r>
+                        <a:rPr lang="en-US" dirty="0" smtClean="0"/>
+                        <a:t> </a:t>
+                      </a:r>
+                      <a:r>
+                        <a:rPr lang="en-US" dirty="0" err="1" smtClean="0"/>
+                        <a:t>untuk</a:t>
+                      </a:r>
+                      <a:r>
+                        <a:rPr lang="en-US" dirty="0" smtClean="0"/>
+                        <a:t> </a:t>
+                      </a:r>
+                      <a:r>
+                        <a:rPr lang="en-US" dirty="0" err="1" smtClean="0"/>
+                        <a:t>banyak</a:t>
+                      </a:r>
+                      <a:r>
+                        <a:rPr lang="en-US" dirty="0" smtClean="0"/>
+                        <a:t> </a:t>
+                      </a:r>
+                      <a:r>
+                        <a:rPr lang="en-US" dirty="0" err="1" smtClean="0"/>
+                        <a:t>pengguna</a:t>
+                      </a:r>
+                      <a:r>
+                        <a:rPr lang="en-US" dirty="0" smtClean="0"/>
+                        <a:t> yang </a:t>
+                      </a:r>
+                      <a:r>
+                        <a:rPr lang="en-US" dirty="0" err="1" smtClean="0"/>
+                        <a:t>berbeda</a:t>
+                      </a:r>
+                      <a:r>
+                        <a:rPr lang="en-US" dirty="0" smtClean="0"/>
+                        <a:t> </a:t>
+                      </a:r>
+                      <a:r>
+                        <a:rPr lang="en-US" dirty="0" err="1" smtClean="0"/>
+                        <a:t>secara</a:t>
+                      </a:r>
+                      <a:r>
+                        <a:rPr lang="en-US" dirty="0" smtClean="0"/>
+                        <a:t> </a:t>
+                      </a:r>
+                      <a:r>
+                        <a:rPr lang="en-US" dirty="0" err="1" smtClean="0"/>
+                        <a:t>bersamaan</a:t>
+                      </a:r>
+                      <a:r>
+                        <a:rPr lang="en-US" dirty="0" smtClean="0"/>
+                        <a:t>.</a:t>
+                      </a:r>
+                      <a:endParaRPr lang="en-US" dirty="0"/>
+                    </a:p>
+                  </a:txBody>
+                  <a:tcPr/>
+                </a:tc>
+                <a:extLst>
+                  <a:ext uri="{0D108BD9-81ED-4DB2-BD59-A6C34878D82A}">
+                    <a16:rowId xmlns:a16="http://schemas.microsoft.com/office/drawing/2014/main" val="147826031"/>
+                  </a:ext>
+                </a:extLst>
+              </a:tr>
+              <a:tr h="370840">
+                <a:tc>
+                  <a:txBody>
+                    <a:bodyPr/>
+                    <a:lstStyle/>
+                    <a:p>
+                      <a:r>
+                        <a:rPr lang="en-US" sz="1350" b="1" u="none" strike="noStrike" kern="1200" dirty="0" err="1" smtClean="0">
+                          <a:solidFill>
+                            <a:schemeClr val="dk1"/>
+                          </a:solidFill>
+                          <a:effectLst/>
+                          <a:latin typeface="+mn-lt"/>
+                          <a:ea typeface="+mn-ea"/>
+                          <a:cs typeface="+mn-cs"/>
+                        </a:rPr>
+                        <a:t>Efisiensi</a:t>
+                      </a:r>
+                      <a:r>
+                        <a:rPr lang="en-US" sz="1350" b="1" u="none" strike="noStrike" kern="1200" dirty="0" smtClean="0">
+                          <a:solidFill>
+                            <a:schemeClr val="dk1"/>
+                          </a:solidFill>
+                          <a:effectLst/>
+                          <a:latin typeface="+mn-lt"/>
+                          <a:ea typeface="+mn-ea"/>
+                          <a:cs typeface="+mn-cs"/>
+                        </a:rPr>
+                        <a:t>:</a:t>
+                      </a:r>
+                      <a:r>
+                        <a:rPr lang="en-US" dirty="0" smtClean="0"/>
+                        <a:t> </a:t>
+                      </a:r>
+                      <a:r>
+                        <a:rPr lang="en-US" dirty="0" err="1" smtClean="0"/>
+                        <a:t>Cocok</a:t>
+                      </a:r>
+                      <a:r>
+                        <a:rPr lang="en-US" dirty="0" smtClean="0"/>
+                        <a:t> </a:t>
+                      </a:r>
+                      <a:r>
+                        <a:rPr lang="en-US" dirty="0" err="1" smtClean="0"/>
+                        <a:t>untuk</a:t>
+                      </a:r>
+                      <a:r>
+                        <a:rPr lang="en-US" dirty="0" smtClean="0"/>
+                        <a:t> </a:t>
+                      </a:r>
+                      <a:r>
+                        <a:rPr lang="en-US" dirty="0" err="1" smtClean="0"/>
+                        <a:t>perusahaan</a:t>
+                      </a:r>
+                      <a:r>
+                        <a:rPr lang="en-US" dirty="0" smtClean="0"/>
+                        <a:t> yang </a:t>
+                      </a:r>
+                      <a:r>
+                        <a:rPr lang="en-US" dirty="0" err="1" smtClean="0"/>
+                        <a:t>ingin</a:t>
+                      </a:r>
+                      <a:r>
+                        <a:rPr lang="en-US" dirty="0" smtClean="0"/>
+                        <a:t> </a:t>
+                      </a:r>
+                      <a:r>
+                        <a:rPr lang="en-US" dirty="0" err="1" smtClean="0"/>
+                        <a:t>menghemat</a:t>
+                      </a:r>
+                      <a:r>
+                        <a:rPr lang="en-US" dirty="0" smtClean="0"/>
+                        <a:t> </a:t>
+                      </a:r>
+                      <a:r>
+                        <a:rPr lang="en-US" dirty="0" err="1" smtClean="0"/>
+                        <a:t>biaya</a:t>
+                      </a:r>
+                      <a:r>
+                        <a:rPr lang="en-US" dirty="0" smtClean="0"/>
+                        <a:t> </a:t>
+                      </a:r>
+                      <a:r>
+                        <a:rPr lang="en-US" dirty="0" err="1" smtClean="0"/>
+                        <a:t>pembelian</a:t>
+                      </a:r>
+                      <a:r>
+                        <a:rPr lang="en-US" dirty="0" smtClean="0"/>
+                        <a:t> server </a:t>
+                      </a:r>
+                      <a:r>
+                        <a:rPr lang="en-US" dirty="0" err="1" smtClean="0"/>
+                        <a:t>fisik</a:t>
+                      </a:r>
+                      <a:r>
+                        <a:rPr lang="en-US" dirty="0" smtClean="0"/>
+                        <a:t> </a:t>
+                      </a:r>
+                      <a:r>
+                        <a:rPr lang="en-US" dirty="0" err="1" smtClean="0"/>
+                        <a:t>dengan</a:t>
+                      </a:r>
+                      <a:r>
+                        <a:rPr lang="en-US" dirty="0" smtClean="0"/>
+                        <a:t> </a:t>
+                      </a:r>
+                      <a:r>
+                        <a:rPr lang="en-US" dirty="0" err="1" smtClean="0"/>
+                        <a:t>cara</a:t>
+                      </a:r>
+                      <a:r>
+                        <a:rPr lang="en-US" dirty="0" smtClean="0"/>
+                        <a:t> </a:t>
+                      </a:r>
+                      <a:r>
+                        <a:rPr lang="en-US" dirty="0" err="1" smtClean="0"/>
+                        <a:t>memaksimalkan</a:t>
+                      </a:r>
+                      <a:r>
+                        <a:rPr lang="en-US" dirty="0" smtClean="0"/>
+                        <a:t> </a:t>
+                      </a:r>
+                      <a:r>
+                        <a:rPr lang="en-US" dirty="0" err="1" smtClean="0"/>
+                        <a:t>kapasitas</a:t>
+                      </a:r>
+                      <a:r>
+                        <a:rPr lang="en-US" dirty="0" smtClean="0"/>
+                        <a:t> server yang </a:t>
+                      </a:r>
+                      <a:r>
+                        <a:rPr lang="en-US" dirty="0" err="1" smtClean="0"/>
+                        <a:t>sudah</a:t>
+                      </a:r>
+                      <a:r>
+                        <a:rPr lang="en-US" dirty="0" smtClean="0"/>
+                        <a:t> </a:t>
+                      </a:r>
+                      <a:r>
+                        <a:rPr lang="en-US" dirty="0" err="1" smtClean="0"/>
+                        <a:t>ada</a:t>
+                      </a:r>
+                      <a:r>
+                        <a:rPr lang="en-US" dirty="0" smtClean="0"/>
+                        <a:t> di </a:t>
+                      </a:r>
+                      <a:r>
+                        <a:rPr lang="en-US" dirty="0" err="1" smtClean="0"/>
+                        <a:t>kantor</a:t>
+                      </a:r>
+                      <a:r>
+                        <a:rPr lang="en-US" dirty="0" smtClean="0"/>
+                        <a:t> </a:t>
+                      </a:r>
+                      <a:r>
+                        <a:rPr lang="en-US" dirty="0" err="1" smtClean="0"/>
+                        <a:t>mereka</a:t>
+                      </a:r>
+                      <a:r>
+                        <a:rPr lang="en-US" dirty="0" smtClean="0"/>
+                        <a:t> </a:t>
+                      </a:r>
+                      <a:r>
+                        <a:rPr lang="en-US" dirty="0" err="1" smtClean="0"/>
+                        <a:t>sendiri</a:t>
+                      </a:r>
+                      <a:r>
+                        <a:rPr lang="en-US" dirty="0" smtClean="0"/>
+                        <a:t> (</a:t>
+                      </a:r>
+                      <a:r>
+                        <a:rPr lang="en-US" sz="1350" b="0" i="1" u="none" strike="noStrike" kern="1200" dirty="0" err="1" smtClean="0">
+                          <a:solidFill>
+                            <a:schemeClr val="dk1"/>
+                          </a:solidFill>
+                          <a:effectLst/>
+                          <a:latin typeface="+mn-lt"/>
+                          <a:ea typeface="+mn-ea"/>
+                          <a:cs typeface="+mn-cs"/>
+                        </a:rPr>
+                        <a:t>on-premise</a:t>
+                      </a:r>
+                      <a:r>
+                        <a:rPr lang="en-US" dirty="0" smtClean="0"/>
+                        <a:t>).</a:t>
+                      </a:r>
+                      <a:endParaRPr lang="en-US" dirty="0"/>
+                    </a:p>
+                  </a:txBody>
+                  <a:tcPr/>
+                </a:tc>
+                <a:tc>
+                  <a:txBody>
+                    <a:bodyPr/>
+                    <a:lstStyle/>
+                    <a:p>
+                      <a:r>
+                        <a:rPr lang="en-US" sz="1350" b="1" u="none" strike="noStrike" kern="1200" dirty="0" err="1" smtClean="0">
+                          <a:solidFill>
+                            <a:schemeClr val="dk1"/>
+                          </a:solidFill>
+                          <a:effectLst/>
+                          <a:latin typeface="+mn-lt"/>
+                          <a:ea typeface="+mn-ea"/>
+                          <a:cs typeface="+mn-cs"/>
+                        </a:rPr>
+                        <a:t>Konektivitas</a:t>
+                      </a:r>
+                      <a:r>
+                        <a:rPr lang="en-US" sz="1350" b="1" u="none" strike="noStrike" kern="1200" dirty="0" smtClean="0">
+                          <a:solidFill>
+                            <a:schemeClr val="dk1"/>
+                          </a:solidFill>
+                          <a:effectLst/>
+                          <a:latin typeface="+mn-lt"/>
+                          <a:ea typeface="+mn-ea"/>
+                          <a:cs typeface="+mn-cs"/>
+                        </a:rPr>
+                        <a:t> Luas:</a:t>
+                      </a:r>
+                      <a:r>
+                        <a:rPr lang="en-US" sz="1350" b="0" u="none" strike="noStrike" kern="1200" dirty="0" smtClean="0">
+                          <a:solidFill>
+                            <a:schemeClr val="dk1"/>
+                          </a:solidFill>
+                          <a:effectLst/>
+                          <a:latin typeface="+mn-lt"/>
+                          <a:ea typeface="+mn-ea"/>
+                          <a:cs typeface="+mn-cs"/>
+                        </a:rPr>
+                        <a:t> </a:t>
+                      </a:r>
+                      <a:r>
+                        <a:rPr lang="en-US" sz="1350" b="0" u="none" strike="noStrike" kern="1200" dirty="0" err="1" smtClean="0">
+                          <a:solidFill>
+                            <a:schemeClr val="dk1"/>
+                          </a:solidFill>
+                          <a:effectLst/>
+                          <a:latin typeface="+mn-lt"/>
+                          <a:ea typeface="+mn-ea"/>
+                          <a:cs typeface="+mn-cs"/>
+                        </a:rPr>
+                        <a:t>Layanan</a:t>
+                      </a:r>
+                      <a:r>
+                        <a:rPr lang="en-US" sz="1350" b="0" u="none" strike="noStrike" kern="1200" dirty="0" smtClean="0">
+                          <a:solidFill>
+                            <a:schemeClr val="dk1"/>
+                          </a:solidFill>
+                          <a:effectLst/>
+                          <a:latin typeface="+mn-lt"/>
+                          <a:ea typeface="+mn-ea"/>
+                          <a:cs typeface="+mn-cs"/>
+                        </a:rPr>
+                        <a:t> </a:t>
+                      </a:r>
+                      <a:r>
+                        <a:rPr lang="en-US" sz="1350" b="0" u="none" strike="noStrike" kern="1200" dirty="0" err="1" smtClean="0">
+                          <a:solidFill>
+                            <a:schemeClr val="dk1"/>
+                          </a:solidFill>
+                          <a:effectLst/>
+                          <a:latin typeface="+mn-lt"/>
+                          <a:ea typeface="+mn-ea"/>
+                          <a:cs typeface="+mn-cs"/>
+                        </a:rPr>
+                        <a:t>dapat</a:t>
+                      </a:r>
+                      <a:r>
+                        <a:rPr lang="en-US" sz="1350" b="0" u="none" strike="noStrike" kern="1200" dirty="0" smtClean="0">
+                          <a:solidFill>
+                            <a:schemeClr val="dk1"/>
+                          </a:solidFill>
+                          <a:effectLst/>
+                          <a:latin typeface="+mn-lt"/>
+                          <a:ea typeface="+mn-ea"/>
+                          <a:cs typeface="+mn-cs"/>
+                        </a:rPr>
+                        <a:t> </a:t>
+                      </a:r>
+                      <a:r>
+                        <a:rPr lang="en-US" sz="1350" b="0" u="none" strike="noStrike" kern="1200" dirty="0" err="1" smtClean="0">
+                          <a:solidFill>
+                            <a:schemeClr val="dk1"/>
+                          </a:solidFill>
+                          <a:effectLst/>
+                          <a:latin typeface="+mn-lt"/>
+                          <a:ea typeface="+mn-ea"/>
+                          <a:cs typeface="+mn-cs"/>
+                        </a:rPr>
+                        <a:t>diakses</a:t>
+                      </a:r>
+                      <a:r>
+                        <a:rPr lang="en-US" sz="1350" b="0" u="none" strike="noStrike" kern="1200" dirty="0" smtClean="0">
+                          <a:solidFill>
+                            <a:schemeClr val="dk1"/>
+                          </a:solidFill>
+                          <a:effectLst/>
+                          <a:latin typeface="+mn-lt"/>
+                          <a:ea typeface="+mn-ea"/>
+                          <a:cs typeface="+mn-cs"/>
+                        </a:rPr>
+                        <a:t> </a:t>
+                      </a:r>
+                      <a:r>
+                        <a:rPr lang="en-US" sz="1350" b="0" u="none" strike="noStrike" kern="1200" dirty="0" err="1" smtClean="0">
+                          <a:solidFill>
+                            <a:schemeClr val="dk1"/>
+                          </a:solidFill>
+                          <a:effectLst/>
+                          <a:latin typeface="+mn-lt"/>
+                          <a:ea typeface="+mn-ea"/>
+                          <a:cs typeface="+mn-cs"/>
+                        </a:rPr>
+                        <a:t>dari</a:t>
+                      </a:r>
+                      <a:r>
+                        <a:rPr lang="en-US" sz="1350" b="0" u="none" strike="noStrike" kern="1200" dirty="0" smtClean="0">
+                          <a:solidFill>
+                            <a:schemeClr val="dk1"/>
+                          </a:solidFill>
+                          <a:effectLst/>
+                          <a:latin typeface="+mn-lt"/>
+                          <a:ea typeface="+mn-ea"/>
+                          <a:cs typeface="+mn-cs"/>
+                        </a:rPr>
+                        <a:t> mana </a:t>
+                      </a:r>
+                      <a:r>
+                        <a:rPr lang="en-US" sz="1350" b="0" u="none" strike="noStrike" kern="1200" dirty="0" err="1" smtClean="0">
+                          <a:solidFill>
+                            <a:schemeClr val="dk1"/>
+                          </a:solidFill>
+                          <a:effectLst/>
+                          <a:latin typeface="+mn-lt"/>
+                          <a:ea typeface="+mn-ea"/>
+                          <a:cs typeface="+mn-cs"/>
+                        </a:rPr>
+                        <a:t>saja</a:t>
+                      </a:r>
+                      <a:r>
+                        <a:rPr lang="en-US" sz="1350" b="0" u="none" strike="noStrike" kern="1200" dirty="0" smtClean="0">
+                          <a:solidFill>
+                            <a:schemeClr val="dk1"/>
+                          </a:solidFill>
+                          <a:effectLst/>
+                          <a:latin typeface="+mn-lt"/>
+                          <a:ea typeface="+mn-ea"/>
+                          <a:cs typeface="+mn-cs"/>
+                        </a:rPr>
+                        <a:t> </a:t>
+                      </a:r>
+                      <a:r>
+                        <a:rPr lang="en-US" sz="1350" b="0" u="none" strike="noStrike" kern="1200" dirty="0" err="1" smtClean="0">
+                          <a:solidFill>
+                            <a:schemeClr val="dk1"/>
+                          </a:solidFill>
+                          <a:effectLst/>
+                          <a:latin typeface="+mn-lt"/>
+                          <a:ea typeface="+mn-ea"/>
+                          <a:cs typeface="+mn-cs"/>
+                        </a:rPr>
+                        <a:t>selama</a:t>
+                      </a:r>
+                      <a:r>
+                        <a:rPr lang="en-US" sz="1350" b="0" u="none" strike="noStrike" kern="1200" dirty="0" smtClean="0">
+                          <a:solidFill>
+                            <a:schemeClr val="dk1"/>
+                          </a:solidFill>
+                          <a:effectLst/>
+                          <a:latin typeface="+mn-lt"/>
+                          <a:ea typeface="+mn-ea"/>
+                          <a:cs typeface="+mn-cs"/>
+                        </a:rPr>
+                        <a:t> </a:t>
+                      </a:r>
+                      <a:r>
+                        <a:rPr lang="en-US" sz="1350" b="0" u="none" strike="noStrike" kern="1200" dirty="0" err="1" smtClean="0">
+                          <a:solidFill>
+                            <a:schemeClr val="dk1"/>
+                          </a:solidFill>
+                          <a:effectLst/>
+                          <a:latin typeface="+mn-lt"/>
+                          <a:ea typeface="+mn-ea"/>
+                          <a:cs typeface="+mn-cs"/>
+                        </a:rPr>
+                        <a:t>terhubung</a:t>
+                      </a:r>
+                      <a:r>
+                        <a:rPr lang="en-US" sz="1350" b="0" u="none" strike="noStrike" kern="1200" dirty="0" smtClean="0">
+                          <a:solidFill>
+                            <a:schemeClr val="dk1"/>
+                          </a:solidFill>
+                          <a:effectLst/>
+                          <a:latin typeface="+mn-lt"/>
+                          <a:ea typeface="+mn-ea"/>
+                          <a:cs typeface="+mn-cs"/>
+                        </a:rPr>
+                        <a:t> </a:t>
+                      </a:r>
+                      <a:r>
+                        <a:rPr lang="en-US" sz="1350" b="0" u="none" strike="noStrike" kern="1200" dirty="0" err="1" smtClean="0">
+                          <a:solidFill>
+                            <a:schemeClr val="dk1"/>
+                          </a:solidFill>
+                          <a:effectLst/>
+                          <a:latin typeface="+mn-lt"/>
+                          <a:ea typeface="+mn-ea"/>
+                          <a:cs typeface="+mn-cs"/>
+                        </a:rPr>
+                        <a:t>dengan</a:t>
+                      </a:r>
+                      <a:r>
+                        <a:rPr lang="en-US" sz="1350" b="0" u="none" strike="noStrike" kern="1200" dirty="0" smtClean="0">
+                          <a:solidFill>
+                            <a:schemeClr val="dk1"/>
+                          </a:solidFill>
+                          <a:effectLst/>
+                          <a:latin typeface="+mn-lt"/>
+                          <a:ea typeface="+mn-ea"/>
+                          <a:cs typeface="+mn-cs"/>
+                        </a:rPr>
+                        <a:t> </a:t>
+                      </a:r>
+                      <a:r>
+                        <a:rPr lang="en-US" sz="1350" b="0" u="none" strike="noStrike" kern="1200" dirty="0" err="1" smtClean="0">
+                          <a:solidFill>
+                            <a:schemeClr val="dk1"/>
+                          </a:solidFill>
+                          <a:effectLst/>
+                          <a:latin typeface="+mn-lt"/>
+                          <a:ea typeface="+mn-ea"/>
+                          <a:cs typeface="+mn-cs"/>
+                        </a:rPr>
+                        <a:t>jaringan</a:t>
+                      </a:r>
+                      <a:r>
+                        <a:rPr lang="en-US" sz="1350" b="0" u="none" strike="noStrike" kern="1200" dirty="0" smtClean="0">
+                          <a:solidFill>
+                            <a:schemeClr val="dk1"/>
+                          </a:solidFill>
+                          <a:effectLst/>
+                          <a:latin typeface="+mn-lt"/>
+                          <a:ea typeface="+mn-ea"/>
+                          <a:cs typeface="+mn-cs"/>
+                        </a:rPr>
+                        <a:t> internet </a:t>
+                      </a:r>
+                      <a:r>
+                        <a:rPr lang="en-US" sz="1350" b="0" u="none" strike="noStrike" kern="1200" dirty="0" err="1" smtClean="0">
+                          <a:solidFill>
+                            <a:schemeClr val="dk1"/>
+                          </a:solidFill>
+                          <a:effectLst/>
+                          <a:latin typeface="+mn-lt"/>
+                          <a:ea typeface="+mn-ea"/>
+                          <a:cs typeface="+mn-cs"/>
+                        </a:rPr>
+                        <a:t>atau</a:t>
+                      </a:r>
+                      <a:r>
+                        <a:rPr lang="en-US" sz="1350" b="0" u="none" strike="noStrike" kern="1200" dirty="0" smtClean="0">
+                          <a:solidFill>
+                            <a:schemeClr val="dk1"/>
+                          </a:solidFill>
+                          <a:effectLst/>
+                          <a:latin typeface="+mn-lt"/>
+                          <a:ea typeface="+mn-ea"/>
+                          <a:cs typeface="+mn-cs"/>
+                        </a:rPr>
+                        <a:t> intranet.</a:t>
+                      </a:r>
+                      <a:endParaRPr lang="en-US" sz="1350" b="0" u="none" strike="noStrike" kern="1200" dirty="0">
+                        <a:solidFill>
+                          <a:schemeClr val="dk1"/>
+                        </a:solidFill>
+                        <a:effectLst/>
+                        <a:latin typeface="+mn-lt"/>
+                        <a:ea typeface="+mn-ea"/>
+                        <a:cs typeface="+mn-cs"/>
+                      </a:endParaRPr>
+                    </a:p>
+                  </a:txBody>
+                  <a:tcPr/>
+                </a:tc>
+                <a:extLst>
+                  <a:ext uri="{0D108BD9-81ED-4DB2-BD59-A6C34878D82A}">
+                    <a16:rowId xmlns:a16="http://schemas.microsoft.com/office/drawing/2014/main" val="2456764776"/>
+                  </a:ext>
+                </a:extLst>
+              </a:tr>
+              <a:tr h="370840">
+                <a:tc>
+                  <a:txBody>
+                    <a:bodyPr/>
+                    <a:lstStyle/>
+                    <a:p>
+                      <a:endParaRPr lang="en-US" dirty="0"/>
+                    </a:p>
+                  </a:txBody>
+                  <a:tcPr/>
+                </a:tc>
+                <a:tc>
+                  <a:txBody>
+                    <a:bodyPr/>
+                    <a:lstStyle/>
+                    <a:p>
+                      <a:endParaRPr lang="en-US" dirty="0"/>
+                    </a:p>
+                  </a:txBody>
+                  <a:tcPr/>
+                </a:tc>
+                <a:extLst>
+                  <a:ext uri="{0D108BD9-81ED-4DB2-BD59-A6C34878D82A}">
+                    <a16:rowId xmlns:a16="http://schemas.microsoft.com/office/drawing/2014/main" val="468848525"/>
+                  </a:ext>
+                </a:extLst>
+              </a:tr>
+            </a:tbl>
+          </a:graphicData>
+        </a:graphic>
+      </p:graphicFrame>
+    </p:spTree>
+    <p:extLst>
+      <p:ext uri="{BB962C8B-B14F-4D97-AF65-F5344CB8AC3E}">
+        <p14:creationId xmlns:p14="http://schemas.microsoft.com/office/powerpoint/2010/main" val="369694621"/>
+      </p:ext>
+    </p:extLst>
+  </p:cSld>
+  <p:clrMapOvr>
+    <a:masterClrMapping/>
+  </p:clrMapOvr>
+  <p:timing>
+    <p:tnLst>
+      <p:par>
+        <p:cTn id="1" dur="indefinite" restart="never" nodeType="tmRoot"/>
+      </p:par>
+    </p:tnLst>
+  </p:timing>
+</p:sld>
+</file>
+
+<file path=ppt/slides/slide37.xml><?xml version="1.0" encoding="utf-8"?>
+<p:sld xmlns:a="http://schemas.openxmlformats.org/drawingml/2006/main" xmlns:r="http://schemas.openxmlformats.org/officeDocument/2006/relationships" xmlns:p="http://schemas.openxmlformats.org/presentationml/2006/main">
+  <p:cSld>
+    <p:spTree>
+      <p:nvGrpSpPr>
+        <p:cNvPr id="1" name=""/>
+        <p:cNvGrpSpPr/>
+        <p:nvPr/>
+      </p:nvGrpSpPr>
+      <p:grpSpPr>
+        <a:xfrm>
+          <a:off x="0" y="0"/>
+          <a:ext cx="0" cy="0"/>
+          <a:chOff x="0" y="0"/>
+          <a:chExt cx="0" cy="0"/>
+        </a:xfrm>
+      </p:grpSpPr>
+      <p:sp>
+        <p:nvSpPr>
+          <p:cNvPr id="4" name="Rectangle 3"/>
+          <p:cNvSpPr/>
+          <p:nvPr/>
+        </p:nvSpPr>
+        <p:spPr>
+          <a:xfrm>
+            <a:off x="4066093" y="3244334"/>
+            <a:ext cx="1011815" cy="369332"/>
+          </a:xfrm>
+          <a:prstGeom prst="rect">
+            <a:avLst/>
+          </a:prstGeom>
+        </p:spPr>
+        <p:txBody>
+          <a:bodyPr wrap="none">
+            <a:spAutoFit/>
+          </a:bodyPr>
+          <a:lstStyle/>
+          <a:p>
+            <a:pPr algn="ctr" eaLnBrk="1" hangingPunct="1">
+              <a:buFont typeface="Times New Roman" pitchFamily="16" charset="0"/>
+              <a:buNone/>
+              <a:defRPr/>
+            </a:pPr>
+            <a:r>
+              <a:rPr lang="en-US" dirty="0" smtClean="0"/>
+              <a:t>Thanks</a:t>
+            </a:r>
+            <a:endParaRPr lang="en-US" b="1" dirty="0">
+              <a:solidFill>
+                <a:schemeClr val="bg1"/>
+              </a:solidFill>
+            </a:endParaRPr>
+          </a:p>
+        </p:txBody>
+      </p:sp>
+    </p:spTree>
+    <p:extLst>
+      <p:ext uri="{BB962C8B-B14F-4D97-AF65-F5344CB8AC3E}">
+        <p14:creationId xmlns:p14="http://schemas.microsoft.com/office/powerpoint/2010/main" val="246782096"/>
+      </p:ext>
+    </p:extLst>
   </p:cSld>
   <p:clrMapOvr>
     <a:masterClrMapping/>
